--- a/arxiv/IST697_Final_Poster.pptx
+++ b/arxiv/IST697_Final_Poster.pptx
@@ -2269,7 +2269,7 @@
                 <a:ea typeface="Calibri" pitchFamily="34" charset="-122"/>
                 <a:cs typeface="Calibri" pitchFamily="34" charset="-120"/>
               </a:rPr>
-              <a:t>. 3D molecular viewer · 8 non-druggable mutations · four-screen workflow.</a:t>
+              <a:t>. 3D molecular viewer · 7 non-druggable mutations · four-screen workflow.</a:t>
             </a:r>
             <a:endParaRPr lang="en-US" sz="2000" dirty="0"/>
           </a:p>
@@ -2323,7 +2323,7 @@
                 <a:ea typeface="Calibri" pitchFamily="34" charset="-122"/>
                 <a:cs typeface="Calibri" pitchFamily="34" charset="-120"/>
               </a:rPr>
-              <a:t> - TP53 C275F, TP53 Y220C, KEAP1 LOF, KEAP1 G333C, KEAP1 R320Q, STK11 LKB1, STK11 F354L, STK11 D194N</a:t>
+              <a:t> - TP53 C275F, KEAP1 LOF, KEAP1 G333C, KEAP1 R320Q, STK11 LKB1, STK11 F354L, STK11 D194N</a:t>
             </a:r>
             <a:endParaRPr lang="en-US" sz="2000" dirty="0"/>
           </a:p>
@@ -4143,7 +4143,7 @@
                 <a:ea typeface="Georgia" pitchFamily="34" charset="-122"/>
                 <a:cs typeface="Georgia" pitchFamily="34" charset="-120"/>
               </a:rPr>
-              <a:t>8</a:t>
+              <a:t>7</a:t>
             </a:r>
             <a:endParaRPr lang="en-US" sz="6400" dirty="0"/>
           </a:p>

--- a/arxiv/IST697_Final_Poster.pptx
+++ b/arxiv/IST697_Final_Poster.pptx
@@ -1250,7 +1250,7 @@
                 <a:ea typeface="Calibri" pitchFamily="34" charset="-122"/>
                 <a:cs typeface="Calibri" pitchFamily="34" charset="-120"/>
               </a:rPr>
-              <a:t>: ±5–10 kcal/mol error; ≤2 kcal/mol required</a:t>
+              <a:t>: 2–4 kcal/mol error → ΔG shifts 5–6× → candidate misclassification</a:t>
             </a:r>
             <a:endParaRPr lang="en-US" sz="2000" dirty="0"/>
           </a:p>
@@ -3081,7 +3081,7 @@
                 <a:ea typeface="Calibri" pitchFamily="34" charset="-122"/>
                 <a:cs typeface="Calibri" pitchFamily="34" charset="-120"/>
               </a:rPr>
-              <a:t>*VQE-</a:t>
+              <a:t>*</a:t>
             </a:r>
             <a:r>
               <a:rPr lang="en-US" sz="2000" b="1" dirty="0" err="1">
@@ -3092,7 +3092,7 @@
                 <a:ea typeface="Calibri" pitchFamily="34" charset="-122"/>
                 <a:cs typeface="Calibri" pitchFamily="34" charset="-120"/>
               </a:rPr>
-              <a:t>sqDRIFT</a:t>
+              <a:t>sqDRIFT (Phase 3B target)</a:t>
             </a:r>
             <a:r>
               <a:rPr lang="en-US" sz="2000" b="1" dirty="0">
@@ -3778,6 +3778,82 @@
                 <a:cs typeface="Calibri" pitchFamily="34" charset="-120"/>
               </a:rPr>
               <a:t> for non-druggable oncology targets - reusable across mutation classes</a:t>
+            </a:r>
+            <a:endParaRPr lang="en-US" sz="2000" dirty="0"/>
+          </a:p>
+          <a:p>
+            <a:pPr marL="342900" indent="-342900">
+              <a:spcAft>
+                <a:spcPts val="400"/>
+              </a:spcAft>
+              <a:buSzPct val="100000"/>
+              <a:buChar char="•"/>
+            </a:pPr>
+            <a:r>
+              <a:rPr lang="en-US" sz="2000" dirty="0">
+                <a:solidFill>
+                  <a:srgbClr val="1F1409"/>
+                </a:solidFill>
+                <a:latin typeface="Calibri" pitchFamily="34" charset="0"/>
+                <a:ea typeface="Calibri" pitchFamily="34" charset="-122"/>
+                <a:cs typeface="Calibri" pitchFamily="34" charset="-120"/>
+              </a:rPr>
+              <a:t>Unlike quantum-</a:t>
+            </a:r>
+            <a:r>
+              <a:rPr lang="en-US" sz="2000" i="1" dirty="0">
+                <a:solidFill>
+                  <a:srgbClr val="1F1409"/>
+                </a:solidFill>
+                <a:latin typeface="Calibri" pitchFamily="34" charset="0"/>
+                <a:ea typeface="Calibri" pitchFamily="34" charset="-122"/>
+                <a:cs typeface="Calibri" pitchFamily="34" charset="-120"/>
+              </a:rPr>
+              <a:t>enhanced</a:t>
+            </a:r>
+            <a:r>
+              <a:rPr lang="en-US" sz="2000" dirty="0">
+                <a:solidFill>
+                  <a:srgbClr val="1F1409"/>
+                </a:solidFill>
+                <a:latin typeface="Calibri" pitchFamily="34" charset="0"/>
+                <a:ea typeface="Calibri" pitchFamily="34" charset="-122"/>
+                <a:cs typeface="Calibri" pitchFamily="34" charset="-120"/>
+              </a:rPr>
+              <a:t> approaches targeting classically-tractable proteins (e.g. KRAS — Vakili et al., </a:t>
+            </a:r>
+            <a:r>
+              <a:rPr lang="en-US" sz="2000" i="1" dirty="0">
+                <a:solidFill>
+                  <a:srgbClr val="1F1409"/>
+                </a:solidFill>
+                <a:latin typeface="Calibri" pitchFamily="34" charset="0"/>
+                <a:ea typeface="Calibri" pitchFamily="34" charset="-122"/>
+                <a:cs typeface="Calibri" pitchFamily="34" charset="-120"/>
+              </a:rPr>
+              <a:t>Nature Biotechnology</a:t>
+            </a:r>
+            <a:r>
+              <a:rPr lang="en-US" sz="2000" dirty="0">
+                <a:solidFill>
+                  <a:srgbClr val="1F1409"/>
+                </a:solidFill>
+                <a:latin typeface="Calibri" pitchFamily="34" charset="0"/>
+                <a:ea typeface="Calibri" pitchFamily="34" charset="-122"/>
+                <a:cs typeface="Calibri" pitchFamily="34" charset="-120"/>
+              </a:rPr>
+              <a:t> 2025), QC here is the </a:t>
+            </a:r>
+            <a:r>
+              <a:rPr lang="en-US" sz="2000" b="1" dirty="0">
+                <a:solidFill>
+                  <a:srgbClr val="1F1409"/>
+                </a:solidFill>
+                <a:latin typeface="Calibri" pitchFamily="34" charset="0"/>
+                <a:ea typeface="Calibri" pitchFamily="34" charset="-122"/>
+                <a:cs typeface="Calibri" pitchFamily="34" charset="-120"/>
+              </a:rPr>
+              <a:t>only available computational path</a:t>
             </a:r>
             <a:endParaRPr lang="en-US" sz="2000" dirty="0"/>
           </a:p>

--- a/arxiv/IST697_Final_Poster.pptx
+++ b/arxiv/IST697_Final_Poster.pptx
@@ -2312,7 +2312,7 @@
                 <a:ea typeface="Calibri" pitchFamily="34" charset="-122"/>
                 <a:cs typeface="Calibri" pitchFamily="34" charset="-120"/>
               </a:rPr>
-              <a:t>5 mutations</a:t>
+              <a:t>7 mutations</a:t>
             </a:r>
             <a:r>
               <a:rPr lang="en-US" sz="2000" dirty="0">
@@ -3114,7 +3114,7 @@
                 <a:ea typeface="Calibri" pitchFamily="34" charset="-122"/>
                 <a:cs typeface="Calibri" pitchFamily="34" charset="-120"/>
               </a:rPr>
-              <a:t> −11.7 kcal/mol  (0.5 error - within threshold)</a:t>
+              <a:t> −11.7 kcal/mol  (0.5 error - within chemical accuracy)</a:t>
             </a:r>
             <a:endParaRPr lang="en-US" sz="2000" dirty="0"/>
           </a:p>
@@ -3211,7 +3211,7 @@
                 <a:latin typeface="Calibri" pitchFamily="34" charset="0"/>
                 <a:cs typeface="Calibri" pitchFamily="34" charset="-120"/>
               </a:rPr>
-              <a:t>*Illustrative figures</a:t>
+              <a:t>*Illustrative figures · Chemical accuracy threshold: ≤1 kcal/mol</a:t>
             </a:r>
             <a:endParaRPr lang="en-US" sz="1600" dirty="0"/>
           </a:p>

--- a/arxiv/IST697_Final_Poster.pptx
+++ b/arxiv/IST697_Final_Poster.pptx
@@ -1174,7 +1174,7 @@
                 <a:ea typeface="Calibri" pitchFamily="34" charset="-122"/>
                 <a:cs typeface="Calibri" pitchFamily="34" charset="-120"/>
               </a:rPr>
-              <a:t> have no FDA-approved targeted therapy. TP53 DNA-contact mutants like </a:t>
+              <a:t> have no FDA-approved targeted therapy. TP53 structural mutants like </a:t>
             </a:r>
             <a:r>
               <a:rPr lang="en-US" sz="2000" b="1" dirty="0">

--- a/arxiv/IST697_Final_Poster.pptx
+++ b/arxiv/IST697_Final_Poster.pptx
@@ -3493,7 +3493,7 @@
                 <a:ea typeface="Calibri" pitchFamily="34" charset="-122"/>
                 <a:cs typeface="Calibri" pitchFamily="34" charset="-120"/>
               </a:rPr>
-              <a:t> - Full ~88-qubit pocket · Sep-Dec 2026</a:t>
+              <a:t> - Full ~88-qubit pocket · proven feasible (94q demonstrated, Merz et al. 2026)</a:t>
             </a:r>
             <a:endParaRPr lang="en-US" sz="2000" dirty="0"/>
           </a:p>

--- a/arxiv/IST697_Final_Poster.pptx
+++ b/arxiv/IST697_Final_Poster.pptx
@@ -3493,7 +3493,7 @@
                 <a:ea typeface="Calibri" pitchFamily="34" charset="-122"/>
                 <a:cs typeface="Calibri" pitchFamily="34" charset="-120"/>
               </a:rPr>
-              <a:t> - Full ~88-qubit pocket · proven feasible (94q demonstrated, Merz et al. 2026)</a:t>
+              <a:t> - Full ~88-qubit active site · proven feasible (94q demonstrated, Merz et al. 2026)</a:t>
             </a:r>
             <a:endParaRPr lang="en-US" sz="2000" dirty="0"/>
           </a:p>

--- a/arxiv/IST697_Final_Poster.pptx
+++ b/arxiv/IST697_Final_Poster.pptx
@@ -3493,7 +3493,7 @@
                 <a:ea typeface="Calibri" pitchFamily="34" charset="-122"/>
                 <a:cs typeface="Calibri" pitchFamily="34" charset="-120"/>
               </a:rPr>
-              <a:t> - Full ~88-qubit active site · proven feasible (94q demonstrated, Merz et al. 2026)</a:t>
+              <a:t>Full ~88-qubit active site · C275F only · proven feasible (94q, Merz et al. 2026) · KEAP1/STK11: fault-tolerant QPU (~2030+) · 152–310q · PDB-verified</a:t>
             </a:r>
             <a:endParaRPr lang="en-US" sz="2000" dirty="0"/>
           </a:p>
@@ -4180,7 +4180,7 @@
                 <a:ea typeface="Calibri" pitchFamily="34" charset="-122"/>
                 <a:cs typeface="Calibri" pitchFamily="34" charset="-120"/>
               </a:rPr>
-              <a:t>Qubits at full pocket (IBM Heron r3 range)</a:t>
+              <a:t>Qubits at full active site (IBM Heron r3 range)</a:t>
             </a:r>
             <a:endParaRPr lang="en-US" sz="1600" dirty="0"/>
           </a:p>

--- a/arxiv/IST697_Final_Poster.pptx
+++ b/arxiv/IST697_Final_Poster.pptx
@@ -3450,7 +3450,7 @@
                 <a:ea typeface="Calibri" pitchFamily="34" charset="-122"/>
                 <a:cs typeface="Calibri" pitchFamily="34" charset="-120"/>
               </a:rPr>
-              <a:t>Phase 3A · Simulator</a:t>
+              <a:t>Phase 3A · Live Circuit</a:t>
             </a:r>
             <a:r>
               <a:rPr lang="en-US" sz="2000" dirty="0">
@@ -3461,7 +3461,7 @@
                 <a:ea typeface="Calibri" pitchFamily="34" charset="-122"/>
                 <a:cs typeface="Calibri" pitchFamily="34" charset="-120"/>
               </a:rPr>
-              <a:t> - PennyLane · 2-qubit proxy active space · May-Aug 2026</a:t>
+              <a:t> - PennyLane · 4-qubit live VQE · PySCF JW Hamiltonian · May-Aug 2026</a:t>
             </a:r>
             <a:endParaRPr lang="en-US" sz="2000" dirty="0"/>
           </a:p>

--- a/arxiv/IST697_Final_Poster.pptx
+++ b/arxiv/IST697_Final_Poster.pptx
@@ -2030,6 +2030,27 @@
               <a:t>Empirical anchor: 32-electron / 100-qubit C₁₃Cl₂ benchmark (Science 2026)</a:t>
             </a:r>
             <a:endParaRPr lang="en-US" dirty="0"/>
+          </a:p>
+          <a:p>
+            <a:pPr marL="342900" indent="-342900">
+              <a:spcAft>
+                <a:spcPts val="300"/>
+              </a:spcAft>
+              <a:buSzPct val="100000"/>
+              <a:buChar char="•"/>
+            </a:pPr>
+            <a:endParaRPr lang="en-US" dirty="0"/>
+            <a:r>
+              <a:rPr lang="en-US" dirty="0">
+                <a:solidFill>
+                  <a:srgbClr val="1F1409"/>
+                </a:solidFill>
+                <a:latin typeface="Calibri" pitchFamily="34" charset="0"/>
+                <a:ea typeface="Calibri" pitchFamily="34" charset="-122"/>
+                <a:cs typeface="Calibri" pitchFamily="34" charset="-120"/>
+              </a:rPr>
+              <a:t>IBM $10B roadmap · Starling 2029: 200 logical qubits · C275F (88q) within trajectory</a:t>
+            </a:r>
           </a:p>
         </p:txBody>
       </p:sp>

--- a/arxiv/IST697_Final_Poster.pptx
+++ b/arxiv/IST697_Final_Poster.pptx
@@ -2027,7 +2027,7 @@
                 <a:ea typeface="Calibri" pitchFamily="34" charset="-122"/>
                 <a:cs typeface="Calibri" pitchFamily="34" charset="-120"/>
               </a:rPr>
-              <a:t>Empirical anchor: 32-electron / 100-qubit C₁₃Cl₂ benchmark (Science 2026)</a:t>
+              <a:t>Empirical anchor: 32-electron / 100-qubit C₁₃Cl₂ benchmark (IBM Research 2026, arXiv:2603.08696)</a:t>
             </a:r>
             <a:endParaRPr lang="en-US" dirty="0"/>
           </a:p>

--- a/arxiv/IST697_Final_Poster.pptx
+++ b/arxiv/IST697_Final_Poster.pptx
@@ -900,7 +900,7 @@
                 <a:ea typeface="Calibri" pitchFamily="34" charset="-122"/>
                 <a:cs typeface="Calibri" pitchFamily="34" charset="-120"/>
               </a:rPr>
-              <a:t>nsclc-quantum-viewer</a:t>
+              <a:t>solange-platform</a:t>
             </a:r>
             <a:endParaRPr lang="en-US" sz="2000" dirty="0"/>
           </a:p>
@@ -917,36 +917,12 @@
                 <a:ea typeface="Calibri" pitchFamily="34" charset="-122"/>
                 <a:cs typeface="Calibri" pitchFamily="34" charset="-120"/>
               </a:rPr>
-              <a:t>.netlify.app</a:t>
+              <a:t>.bio</a:t>
             </a:r>
             <a:endParaRPr lang="en-US" sz="2000" dirty="0"/>
           </a:p>
         </p:txBody>
       </p:sp>
-      <p:pic>
-        <p:nvPicPr>
-          <p:cNvPr id="9" name="Image 2" descr="qrcode.jpg"/>
-          <p:cNvPicPr>
-            <a:picLocks noChangeAspect="1"/>
-          </p:cNvPicPr>
-          <p:nvPr/>
-        </p:nvPicPr>
-        <p:blipFill>
-          <a:blip r:embed="rId5"/>
-          <a:stretch>
-            <a:fillRect/>
-          </a:stretch>
-        </p:blipFill>
-        <p:spPr>
-          <a:xfrm>
-            <a:off x="30540960" y="1874520"/>
-            <a:ext cx="1828800" cy="1828800"/>
-          </a:xfrm>
-          <a:prstGeom prst="rect">
-            <a:avLst/>
-          </a:prstGeom>
-        </p:spPr>
-      </p:pic>
       <p:sp>
         <p:nvSpPr>
           <p:cNvPr id="10" name="Shape 5"/>
@@ -2511,7 +2487,7 @@
                 <a:ea typeface="Calibri" pitchFamily="34" charset="-122"/>
                 <a:cs typeface="Calibri" pitchFamily="34" charset="-120"/>
               </a:rPr>
-              <a:t>→ nsclc-quantum-viewer.netlify.app</a:t>
+              <a:t>→ solange-platform.bio</a:t>
             </a:r>
             <a:endParaRPr lang="en-US" sz="1600" dirty="0"/>
           </a:p>
@@ -4123,7 +4099,7 @@
                 <a:ea typeface="Calibri" pitchFamily="34" charset="-122"/>
                 <a:cs typeface="Calibri" pitchFamily="34" charset="-120"/>
               </a:rPr>
-              <a:t>quantum-derived mechanistic features for radioresistance in TP53 contact-mutant tumors. Reserved for a post-doctoral program extending the dissertation infrastructure into clinical decision support.</a:t>
+              <a:t>quantum-derived mechanistic features for radioresistance in TP53 structural-mutant tumors. Reserved for a post-doctoral program extending the dissertation infrastructure into clinical decision support.</a:t>
             </a:r>
             <a:endParaRPr lang="en-US" sz="1600" dirty="0"/>
           </a:p>
@@ -4567,6 +4543,30 @@
           </a:p>
         </p:txBody>
       </p:sp>
+      <p:pic>
+        <p:nvPicPr>
+          <p:cNvPr id="72" name="Picture 71" descr="solange_qr.png"/>
+          <p:cNvPicPr>
+            <a:picLocks noChangeAspect="1"/>
+          </p:cNvPicPr>
+          <p:nvPr/>
+        </p:nvPicPr>
+        <p:blipFill>
+          <a:blip r:embed="rId8"/>
+          <a:stretch>
+            <a:fillRect/>
+          </a:stretch>
+        </p:blipFill>
+        <p:spPr>
+          <a:xfrm>
+            <a:off x="30540960" y="1874520"/>
+            <a:ext cx="1828800" cy="1828800"/>
+          </a:xfrm>
+          <a:prstGeom prst="rect">
+            <a:avLst/>
+          </a:prstGeom>
+        </p:spPr>
+      </p:pic>
     </p:spTree>
   </p:cSld>
   <p:clrMapOvr>

--- a/arxiv/IST697_Final_Poster.pptx
+++ b/arxiv/IST697_Final_Poster.pptx
@@ -2266,7 +2266,7 @@
                 <a:ea typeface="Calibri" pitchFamily="34" charset="-122"/>
                 <a:cs typeface="Calibri" pitchFamily="34" charset="-120"/>
               </a:rPr>
-              <a:t>. 3D molecular viewer · 7 non-druggable mutations · four-screen workflow.</a:t>
+              <a:t>. 3D molecular viewer · 7 validated core mutations · four-screen workflow.</a:t>
             </a:r>
             <a:endParaRPr lang="en-US" sz="2000" dirty="0"/>
           </a:p>
@@ -2309,7 +2309,7 @@
                 <a:ea typeface="Calibri" pitchFamily="34" charset="-122"/>
                 <a:cs typeface="Calibri" pitchFamily="34" charset="-120"/>
               </a:rPr>
-              <a:t>7 mutations</a:t>
+              <a:t>7 core mutations</a:t>
             </a:r>
             <a:r>
               <a:rPr lang="en-US" sz="2000" dirty="0">
@@ -2320,7 +2320,7 @@
                 <a:ea typeface="Calibri" pitchFamily="34" charset="-122"/>
                 <a:cs typeface="Calibri" pitchFamily="34" charset="-120"/>
               </a:rPr>
-              <a:t> - TP53 C275F, KEAP1 LOF, KEAP1 G333C, KEAP1 R320Q, STK11 LKB1, STK11 F354L, STK11 D194N</a:t>
+              <a:t> - TP53 C275F, KEAP1 LOF, KEAP1 G333C, KEAP1 R320Q, STK11 LKB1, STK11 F354L, STK11 D194N; extensible to 25+ tumor-suppressor genes (expansion pipeline)</a:t>
             </a:r>
             <a:endParaRPr lang="en-US" sz="2000" dirty="0"/>
           </a:p>
@@ -4255,7 +4255,7 @@
                 <a:ea typeface="Calibri" pitchFamily="34" charset="-122"/>
                 <a:cs typeface="Calibri" pitchFamily="34" charset="-120"/>
               </a:rPr>
-              <a:t>non-druggable NSCLC mutations targeted</a:t>
+              <a:t>core non-druggable mutations · 25+ genes platform-wide</a:t>
             </a:r>
             <a:endParaRPr lang="en-US" sz="1600" dirty="0"/>
           </a:p>

--- a/arxiv/IST697_Final_Poster.pptx
+++ b/arxiv/IST697_Final_Poster.pptx
@@ -2025,7 +2025,7 @@
                 <a:ea typeface="Calibri" pitchFamily="34" charset="-122"/>
                 <a:cs typeface="Calibri" pitchFamily="34" charset="-120"/>
               </a:rPr>
-              <a:t>IBM $10B roadmap · Starling 2029: 200 logical qubits · C275F (88q) within trajectory</a:t>
+              <a:t>IBM $10B+ roadmap · Starling 2029: 200 logical qubits · C275F (88q) within trajectory</a:t>
             </a:r>
           </a:p>
         </p:txBody>
@@ -2448,7 +2448,7 @@
                 <a:ea typeface="Calibri" pitchFamily="34" charset="-122"/>
                 <a:cs typeface="Calibri" pitchFamily="34" charset="-120"/>
               </a:rPr>
-              <a:t> (Qiskit / CUDA-Q ready)</a:t>
+              <a:t> (Qiskit live · CUDA-Q-compatible design)</a:t>
             </a:r>
             <a:endParaRPr lang="en-US" sz="2000" dirty="0"/>
           </a:p>
@@ -2718,7 +2718,7 @@
                 <a:ea typeface="Calibri" pitchFamily="34" charset="-122"/>
                 <a:cs typeface="Calibri" pitchFamily="34" charset="-120"/>
               </a:rPr>
-              <a:t> docked at the loop-sheet-helix DNA-contact region</a:t>
+              <a:t> shown at the loop-sheet-helix DNA-contact region (illustrative)</a:t>
             </a:r>
             <a:endParaRPr lang="en-US" sz="2000" dirty="0"/>
           </a:p>
@@ -2750,7 +2750,7 @@
                 <a:ea typeface="Calibri" pitchFamily="34" charset="-122"/>
                 <a:cs typeface="Calibri" pitchFamily="34" charset="-120"/>
               </a:rPr>
-              <a:t>sqDRIFT wavefunction sampling</a:t>
+              <a:t>wavefunction visualization</a:t>
             </a:r>
             <a:endParaRPr lang="en-US" sz="2000" dirty="0"/>
           </a:p>
@@ -2782,7 +2782,7 @@
                 <a:ea typeface="Calibri" pitchFamily="34" charset="-122"/>
                 <a:cs typeface="Calibri" pitchFamily="34" charset="-120"/>
               </a:rPr>
-              <a:t>active-space electron-density distribution</a:t>
+              <a:t>active-space region (illustrative)</a:t>
             </a:r>
             <a:endParaRPr lang="en-US" sz="2000" dirty="0"/>
           </a:p>
@@ -3458,7 +3458,7 @@
                 <a:ea typeface="Calibri" pitchFamily="34" charset="-122"/>
                 <a:cs typeface="Calibri" pitchFamily="34" charset="-120"/>
               </a:rPr>
-              <a:t> - PennyLane · 4-qubit live VQE · PySCF JW Hamiltonian · May-Aug 2026</a:t>
+              <a:t> - PennyLane 4-qubit live VQE + ~20e/40q HPC intermediate (NSF ACCESS / USC CARC) · PySCF JW Hamiltonian · May-Aug 2026</a:t>
             </a:r>
             <a:endParaRPr lang="en-US" sz="2000" dirty="0"/>
           </a:p>
@@ -3839,7 +3839,7 @@
                 <a:ea typeface="Calibri" pitchFamily="34" charset="-122"/>
                 <a:cs typeface="Calibri" pitchFamily="34" charset="-120"/>
               </a:rPr>
-              <a:t> 2025), QC here is the </a:t>
+              <a:t> 2025), classical methods here become computationally prohibitive at chemical accuracy</a:t>
             </a:r>
             <a:r>
               <a:rPr lang="en-US" sz="2000" b="1" dirty="0">
@@ -3850,7 +3850,7 @@
                 <a:ea typeface="Calibri" pitchFamily="34" charset="-122"/>
                 <a:cs typeface="Calibri" pitchFamily="34" charset="-120"/>
               </a:rPr>
-              <a:t>only available computational path</a:t>
+              <a:t/>
             </a:r>
             <a:endParaRPr lang="en-US" sz="2000" dirty="0"/>
           </a:p>
@@ -4333,7 +4333,7 @@
                 <a:ea typeface="Calibri" pitchFamily="34" charset="-122"/>
                 <a:cs typeface="Calibri" pitchFamily="34" charset="-120"/>
               </a:rPr>
-              <a:t>non-druggable target coverage at platform release</a:t>
+              <a:t>of validated core targets with live JW Hamiltonians</a:t>
             </a:r>
             <a:endParaRPr lang="en-US" sz="1600" dirty="0"/>
           </a:p>

--- a/arxiv/IST697_Final_Poster.pptx
+++ b/arxiv/IST697_Final_Poster.pptx
@@ -1950,7 +1950,7 @@
                 <a:ea typeface="Calibri" pitchFamily="34" charset="-122"/>
                 <a:cs typeface="Calibri" pitchFamily="34" charset="-120"/>
               </a:rPr>
-              <a:t>IBM Heron r3 · 156 qubits · heavy-hex lattice</a:t>
+              <a:t>IBM Heron r3 · 156 qubits · heavy-hex lattice · ~350 µs T2, improved gate/readout fidelity (r3 ibm_pittsburgh, IBM Quantum 2026)</a:t>
             </a:r>
             <a:endParaRPr lang="en-US" dirty="0"/>
           </a:p>
@@ -2026,6 +2026,11 @@
                 <a:cs typeface="Calibri" pitchFamily="34" charset="-120"/>
               </a:rPr>
               <a:t>IBM $10B+ roadmap · Starling 2029: 200 logical qubits · C275F (88q) within trajectory</a:t>
+            </a:r>
+          </a:p>
+          <a:p>
+            <a:r>
+              <a:t>Heron r3 spec: IBM Quantum, Processor types &amp; 2026-01 product update (ibm_pittsburgh).</a:t>
             </a:r>
           </a:p>
         </p:txBody>

--- a/arxiv/IST697_Final_Poster.pptx
+++ b/arxiv/IST697_Final_Poster.pptx
@@ -1982,7 +1982,7 @@
                 <a:ea typeface="Calibri" pitchFamily="34" charset="-122"/>
                 <a:cs typeface="Calibri" pitchFamily="34" charset="-120"/>
               </a:rPr>
-              <a:t> - sample-based quantum diagonalization (Trotterized)</a:t>
+              <a:t> - sample-based quantum diagonalization (Trotterized, stochastic drift)</a:t>
             </a:r>
             <a:endParaRPr lang="en-US" dirty="0"/>
           </a:p>

--- a/arxiv/IST697_Final_Poster.pptx
+++ b/arxiv/IST697_Final_Poster.pptx
@@ -700,7 +700,7 @@
         </p:blipFill>
         <p:spPr>
           <a:xfrm>
-            <a:off x="457200" y="365760"/>
+            <a:off x="457200" y="182878"/>
             <a:ext cx="4023360" cy="1463040"/>
           </a:xfrm>
           <a:prstGeom prst="rect">
@@ -723,8 +723,8 @@
         </p:blipFill>
         <p:spPr>
           <a:xfrm>
-            <a:off x="457200" y="1874520"/>
-            <a:ext cx="4023360" cy="1554480"/>
+            <a:off x="457200" y="1640726"/>
+            <a:ext cx="4023360" cy="1337801"/>
           </a:xfrm>
           <a:prstGeom prst="rect">
             <a:avLst/>
@@ -784,7 +784,7 @@
                 </a:solidFill>
                 <a:latin typeface="Georgia" pitchFamily="34" charset="0"/>
               </a:rPr>
-              <a:t> for Quantum Simulation of non-druggable NSCLC Tumor Suppressor Mutations</a:t>
+              <a:t> for Quantum Simulation of Non-druggable NSCLC Tumor Suppressor Mutations</a:t>
             </a:r>
           </a:p>
         </p:txBody>
@@ -875,8 +875,8 @@
         </p:nvSpPr>
         <p:spPr>
           <a:xfrm>
-            <a:off x="27432000" y="868680"/>
-            <a:ext cx="5029200" cy="914400"/>
+            <a:off x="30284287" y="1051560"/>
+            <a:ext cx="2342146" cy="914400"/>
           </a:xfrm>
           <a:prstGeom prst="rect">
             <a:avLst/>
@@ -888,11 +888,11 @@
           <a:bodyPr wrap="square" lIns="0" tIns="0" rIns="0" bIns="0" rtlCol="0" anchor="ctr"/>
           <a:lstStyle/>
           <a:p>
-            <a:pPr marL="0" indent="0" algn="r">
+            <a:pPr marL="0" indent="0">
               <a:buNone/>
             </a:pPr>
             <a:r>
-              <a:rPr lang="en-US" sz="2000" b="1" dirty="0">
+              <a:rPr lang="en-US" sz="2000" b="1" dirty="0" err="1">
                 <a:solidFill>
                   <a:srgbClr val="1F1409"/>
                 </a:solidFill>
@@ -902,14 +902,8 @@
               </a:rPr>
               <a:t>solange-platform</a:t>
             </a:r>
-            <a:endParaRPr lang="en-US" sz="2000" dirty="0"/>
-          </a:p>
-          <a:p>
-            <a:pPr marL="0" indent="0" algn="r">
-              <a:buNone/>
-            </a:pPr>
-            <a:r>
-              <a:rPr lang="en-US" sz="2000" b="1" dirty="0">
+            <a:r>
+              <a:rPr lang="en-US" sz="2000" b="1" dirty="0" err="1">
                 <a:solidFill>
                   <a:srgbClr val="C75A2E"/>
                 </a:solidFill>
@@ -961,7 +955,7 @@
         </p:nvSpPr>
         <p:spPr>
           <a:xfrm>
-            <a:off x="457200" y="4114800"/>
+            <a:off x="558437" y="4121334"/>
             <a:ext cx="9601200" cy="6492240"/>
           </a:xfrm>
           <a:prstGeom prst="rect">
@@ -981,6 +975,7 @@
           <a:bodyPr/>
           <a:lstStyle/>
           <a:p>
+            <a:pPr marL="0" algn="l" defTabSz="914400" rtl="0" eaLnBrk="1" latinLnBrk="0" hangingPunct="1"/>
             <a:endParaRPr lang="en-US"/>
           </a:p>
         </p:txBody>
@@ -1033,7 +1028,7 @@
         <p:spPr>
           <a:xfrm>
             <a:off x="868680" y="4841126"/>
-            <a:ext cx="8961120" cy="1828800"/>
+            <a:ext cx="8961120" cy="1004621"/>
           </a:xfrm>
           <a:prstGeom prst="rect">
             <a:avLst/>
@@ -1065,12 +1060,10 @@
               </a:rPr>
               <a:t> TP53 mutations</a:t>
             </a:r>
-            <a:endParaRPr lang="en-US" sz="2800" dirty="0"/>
-          </a:p>
-          <a:p>
-            <a:pPr marL="0" indent="0">
-              <a:buNone/>
-            </a:pPr>
+            <a:r>
+              <a:rPr lang="en-US" sz="2800" dirty="0"/>
+              <a:t> </a:t>
+            </a:r>
             <a:r>
               <a:rPr lang="en-US" sz="2800" b="1" dirty="0">
                 <a:solidFill>
@@ -1111,7 +1104,7 @@
         </p:nvSpPr>
         <p:spPr>
           <a:xfrm>
-            <a:off x="777240" y="6343158"/>
+            <a:off x="777240" y="5729197"/>
             <a:ext cx="8961120" cy="1691640"/>
           </a:xfrm>
           <a:prstGeom prst="rect">
@@ -1186,7 +1179,7 @@
         </p:nvSpPr>
         <p:spPr>
           <a:xfrm>
-            <a:off x="777240" y="7975164"/>
+            <a:off x="777240" y="7269762"/>
             <a:ext cx="8961120" cy="1371600"/>
           </a:xfrm>
           <a:prstGeom prst="rect">
@@ -1226,7 +1219,29 @@
                 <a:ea typeface="Calibri" pitchFamily="34" charset="-122"/>
                 <a:cs typeface="Calibri" pitchFamily="34" charset="-120"/>
               </a:rPr>
-              <a:t>: 2–4 kcal/mol error → ΔG shifts 5–6× → candidate misclassification</a:t>
+              <a:t>: 2-4 kcal/mol error → ΔG shifts x5</a:t>
+            </a:r>
+            <a:r>
+              <a:rPr lang="he-IL" sz="2000" dirty="0">
+                <a:solidFill>
+                  <a:srgbClr val="1F1409"/>
+                </a:solidFill>
+                <a:latin typeface="Calibri" pitchFamily="34" charset="0"/>
+                <a:ea typeface="Calibri" pitchFamily="34" charset="-122"/>
+                <a:cs typeface="Calibri" pitchFamily="34" charset="-120"/>
+              </a:rPr>
+              <a:t>-</a:t>
+            </a:r>
+            <a:r>
+              <a:rPr lang="en-US" sz="2000" dirty="0">
+                <a:solidFill>
+                  <a:srgbClr val="1F1409"/>
+                </a:solidFill>
+                <a:latin typeface="Calibri" pitchFamily="34" charset="0"/>
+                <a:ea typeface="Calibri" pitchFamily="34" charset="-122"/>
+                <a:cs typeface="Calibri" pitchFamily="34" charset="-120"/>
+              </a:rPr>
+              <a:t>6 → candidate misclassification</a:t>
             </a:r>
             <a:endParaRPr lang="en-US" sz="2000" dirty="0"/>
           </a:p>
@@ -1258,7 +1273,7 @@
                 <a:ea typeface="Calibri" pitchFamily="34" charset="-122"/>
                 <a:cs typeface="Calibri" pitchFamily="34" charset="-120"/>
               </a:rPr>
-              <a:t>: gold standard, but O(N⁷) infeasible at 44 active electrons</a:t>
+              <a:t>: gold standard, but O(N⁷) infeasible at 48 active electrons</a:t>
             </a:r>
             <a:endParaRPr lang="en-US" sz="2000" dirty="0"/>
           </a:p>
@@ -1290,7 +1305,7 @@
                 <a:ea typeface="Calibri" pitchFamily="34" charset="-122"/>
                 <a:cs typeface="Calibri" pitchFamily="34" charset="-120"/>
               </a:rPr>
-              <a:t>: O(2ⁿ) ~ 10¹³ ops at N=44 - intractable</a:t>
+              <a:t>: O(2ⁿ) ~ 10¹³ ops at N=48 - intractable</a:t>
             </a:r>
             <a:endParaRPr lang="en-US" sz="2000" dirty="0"/>
           </a:p>
@@ -1304,8 +1319,8 @@
         </p:nvSpPr>
         <p:spPr>
           <a:xfrm>
-            <a:off x="777240" y="9584500"/>
-            <a:ext cx="8048708" cy="958532"/>
+            <a:off x="777240" y="8787384"/>
+            <a:ext cx="9304020" cy="1507451"/>
           </a:xfrm>
           <a:prstGeom prst="rect">
             <a:avLst/>
@@ -1319,6 +1334,7 @@
           <a:bodyPr/>
           <a:lstStyle/>
           <a:p>
+            <a:pPr marL="0" algn="r" defTabSz="914400" rtl="1" eaLnBrk="1" latinLnBrk="0" hangingPunct="1"/>
             <a:endParaRPr lang="en-US"/>
           </a:p>
         </p:txBody>
@@ -1459,7 +1475,7 @@
                 <a:ea typeface="Calibri" pitchFamily="34" charset="-122"/>
                 <a:cs typeface="Calibri" pitchFamily="34" charset="-120"/>
               </a:rPr>
-              <a:t>NGS PATIENT INPUT*  </a:t>
+              <a:t>NGS PATIENT INPUT  </a:t>
             </a:r>
             <a:r>
               <a:rPr lang="en-US" dirty="0">
@@ -1579,12 +1595,13 @@
           <a:bodyPr wrap="square" lIns="0" tIns="0" rIns="0" bIns="0" rtlCol="0" anchor="ctr"/>
           <a:lstStyle/>
           <a:p>
-            <a:pPr marL="342900" indent="-342900">
+            <a:pPr marL="285750" indent="-285750">
               <a:spcAft>
                 <a:spcPts val="300"/>
               </a:spcAft>
               <a:buSzPct val="100000"/>
-              <a:buChar char="◆"/>
+              <a:buFont typeface="Arial" panose="020B0604020202020204" pitchFamily="34" charset="0"/>
+              <a:buChar char="•"/>
             </a:pPr>
             <a:r>
               <a:rPr lang="en-US" dirty="0">
@@ -1595,17 +1612,18 @@
                 <a:ea typeface="Calibri" pitchFamily="34" charset="-122"/>
                 <a:cs typeface="Calibri" pitchFamily="34" charset="-120"/>
               </a:rPr>
-              <a:t>BQP-relevance classification framework - non-druggable tumor-suppressor mutations (§06.i)</a:t>
+              <a:t>BQP-relevance classification framework - non-druggable tumor-suppressor mutations </a:t>
             </a:r>
             <a:endParaRPr lang="en-US" dirty="0"/>
           </a:p>
           <a:p>
-            <a:pPr marL="342900" indent="-342900">
+            <a:pPr marL="285750" indent="-285750">
               <a:spcAft>
                 <a:spcPts val="300"/>
               </a:spcAft>
               <a:buSzPct val="100000"/>
-              <a:buChar char="◆"/>
+              <a:buFont typeface="Arial" panose="020B0604020202020204" pitchFamily="34" charset="0"/>
+              <a:buChar char="•"/>
             </a:pPr>
             <a:r>
               <a:rPr lang="en-US" dirty="0">
@@ -1616,17 +1634,18 @@
                 <a:ea typeface="Calibri" pitchFamily="34" charset="-122"/>
                 <a:cs typeface="Calibri" pitchFamily="34" charset="-120"/>
               </a:rPr>
-              <a:t>Translational orchestration - oncology-specific · Part-11-governed · bifurcation-aware (§06.ii)</a:t>
+              <a:t>Translational orchestration - oncology-specific · Part-11-governed · bifurcation-aware </a:t>
             </a:r>
             <a:endParaRPr lang="en-US" dirty="0"/>
           </a:p>
           <a:p>
-            <a:pPr marL="342900" indent="-342900">
+            <a:pPr marL="285750" indent="-285750">
               <a:spcAft>
                 <a:spcPts val="300"/>
               </a:spcAft>
               <a:buSzPct val="100000"/>
-              <a:buChar char="◆"/>
+              <a:buFont typeface="Arial" panose="020B0604020202020204" pitchFamily="34" charset="0"/>
+              <a:buChar char="•"/>
             </a:pPr>
             <a:r>
               <a:rPr lang="en-US" dirty="0">
@@ -1637,7 +1656,7 @@
                 <a:ea typeface="Calibri" pitchFamily="34" charset="-122"/>
                 <a:cs typeface="Calibri" pitchFamily="34" charset="-120"/>
               </a:rPr>
-              <a:t>FDA 21 CFR Part 11 framework with ML-decoder provenance, P1 - P9 (§06.iii)</a:t>
+              <a:t>FDA 21 CFR Part 11 framework with ML-decoder provenance, P1 - P9 </a:t>
             </a:r>
             <a:endParaRPr lang="en-US" dirty="0"/>
           </a:p>
@@ -1746,11 +1765,12 @@
           <a:bodyPr wrap="square" lIns="0" tIns="0" rIns="0" bIns="0" rtlCol="0" anchor="ctr"/>
           <a:lstStyle/>
           <a:p>
-            <a:pPr marL="342900" indent="-342900">
+            <a:pPr marL="285750" indent="-285750">
               <a:spcAft>
                 <a:spcPts val="300"/>
               </a:spcAft>
               <a:buSzPct val="100000"/>
+              <a:buFont typeface="Arial" panose="020B0604020202020204" pitchFamily="34" charset="0"/>
               <a:buChar char="•"/>
             </a:pPr>
             <a:r>
@@ -1762,16 +1782,16 @@
                 <a:ea typeface="Calibri" pitchFamily="34" charset="-122"/>
                 <a:cs typeface="Calibri" pitchFamily="34" charset="-120"/>
               </a:rPr>
-              <a:t>Hybrid orchestration - CUDA-Q + NVQLink (Nvidia stack)</a:t>
-            </a:r>
-            <a:endParaRPr lang="en-US" dirty="0"/>
-          </a:p>
-          <a:p>
-            <a:pPr marL="342900" indent="-342900">
+              <a:t>HPC orchestration - pull-based agent, USC CARC 'Laguna' · no stored credentials</a:t>
+            </a:r>
+          </a:p>
+          <a:p>
+            <a:pPr marL="285750" indent="-285750">
               <a:spcAft>
                 <a:spcPts val="300"/>
               </a:spcAft>
               <a:buSzPct val="100000"/>
+              <a:buFont typeface="Arial" panose="020B0604020202020204" pitchFamily="34" charset="0"/>
               <a:buChar char="•"/>
             </a:pPr>
             <a:r>
@@ -1783,16 +1803,60 @@
                 <a:ea typeface="Calibri" pitchFamily="34" charset="-122"/>
                 <a:cs typeface="Calibri" pitchFamily="34" charset="-120"/>
               </a:rPr>
-              <a:t>Quantum reliability - Nvidia Ising VLM calibration · 3D CNN decoder (Apr 2026)</a:t>
-            </a:r>
-            <a:endParaRPr lang="en-US" dirty="0"/>
-          </a:p>
-          <a:p>
-            <a:pPr marL="342900" indent="-342900">
+              <a:t>Active-space selection - AVAS (</a:t>
+            </a:r>
+            <a:r>
+              <a:rPr lang="en-US" dirty="0" err="1">
+                <a:solidFill>
+                  <a:srgbClr val="1F1409"/>
+                </a:solidFill>
+                <a:latin typeface="Calibri" pitchFamily="34" charset="0"/>
+                <a:ea typeface="Calibri" pitchFamily="34" charset="-122"/>
+                <a:cs typeface="Calibri" pitchFamily="34" charset="-120"/>
+              </a:rPr>
+              <a:t>PySCF</a:t>
+            </a:r>
+            <a:r>
+              <a:rPr lang="en-US" dirty="0">
+                <a:solidFill>
+                  <a:srgbClr val="1F1409"/>
+                </a:solidFill>
+                <a:latin typeface="Calibri" pitchFamily="34" charset="0"/>
+                <a:ea typeface="Calibri" pitchFamily="34" charset="-122"/>
+                <a:cs typeface="Calibri" pitchFamily="34" charset="-120"/>
+              </a:rPr>
+              <a:t>), </a:t>
+            </a:r>
+            <a:r>
+              <a:rPr lang="en-US" dirty="0" err="1">
+                <a:solidFill>
+                  <a:srgbClr val="1F1409"/>
+                </a:solidFill>
+                <a:latin typeface="Calibri" pitchFamily="34" charset="0"/>
+                <a:ea typeface="Calibri" pitchFamily="34" charset="-122"/>
+                <a:cs typeface="Calibri" pitchFamily="34" charset="-120"/>
+              </a:rPr>
+              <a:t>RDKit</a:t>
+            </a:r>
+            <a:r>
+              <a:rPr lang="en-US" dirty="0">
+                <a:solidFill>
+                  <a:srgbClr val="1F1409"/>
+                </a:solidFill>
+                <a:latin typeface="Calibri" pitchFamily="34" charset="0"/>
+                <a:ea typeface="Calibri" pitchFamily="34" charset="-122"/>
+                <a:cs typeface="Calibri" pitchFamily="34" charset="-120"/>
+              </a:rPr>
+              <a:t>-built fragments from real PDB coords</a:t>
+            </a:r>
+          </a:p>
+          <a:p>
+            <a:pPr marL="285750" indent="-285750">
               <a:spcAft>
                 <a:spcPts val="300"/>
               </a:spcAft>
               <a:buSzPct val="100000"/>
+              <a:buFont typeface="Arial" panose="020B0604020202020204" pitchFamily="34" charset="0"/>
               <a:buChar char="•"/>
             </a:pPr>
             <a:r>
@@ -1804,16 +1868,60 @@
                 <a:ea typeface="Calibri" pitchFamily="34" charset="-122"/>
                 <a:cs typeface="Calibri" pitchFamily="34" charset="-120"/>
               </a:rPr>
-              <a:t>Input prep - DFT (PySCF) · DMRG baseline + non-active-space treatment</a:t>
-            </a:r>
-            <a:endParaRPr lang="en-US" dirty="0"/>
-          </a:p>
-          <a:p>
-            <a:pPr marL="342900" indent="-342900">
+              <a:t>Classical-tractability classifier - block2 DMRG, </a:t>
+            </a:r>
+            <a:r>
+              <a:rPr lang="el-GR" dirty="0">
+                <a:solidFill>
+                  <a:srgbClr val="1F1409"/>
+                </a:solidFill>
+                <a:latin typeface="Calibri" pitchFamily="34" charset="0"/>
+                <a:ea typeface="Calibri" pitchFamily="34" charset="-122"/>
+                <a:cs typeface="Calibri" pitchFamily="34" charset="-120"/>
+              </a:rPr>
+              <a:t>Δ</a:t>
+            </a:r>
+            <a:r>
+              <a:rPr lang="en-US" dirty="0">
+                <a:solidFill>
+                  <a:srgbClr val="1F1409"/>
+                </a:solidFill>
+                <a:latin typeface="Calibri" pitchFamily="34" charset="0"/>
+                <a:ea typeface="Calibri" pitchFamily="34" charset="-122"/>
+                <a:cs typeface="Calibri" pitchFamily="34" charset="-120"/>
+              </a:rPr>
+              <a:t>E&lt;1.6 </a:t>
+            </a:r>
+            <a:r>
+              <a:rPr lang="en-US" dirty="0" err="1">
+                <a:solidFill>
+                  <a:srgbClr val="1F1409"/>
+                </a:solidFill>
+                <a:latin typeface="Calibri" pitchFamily="34" charset="0"/>
+                <a:ea typeface="Calibri" pitchFamily="34" charset="-122"/>
+                <a:cs typeface="Calibri" pitchFamily="34" charset="-120"/>
+              </a:rPr>
+              <a:t>mHa</a:t>
+            </a:r>
+            <a:r>
+              <a:rPr lang="en-US" dirty="0">
+                <a:solidFill>
+                  <a:srgbClr val="1F1409"/>
+                </a:solidFill>
+                <a:latin typeface="Calibri" pitchFamily="34" charset="0"/>
+                <a:ea typeface="Calibri" pitchFamily="34" charset="-122"/>
+                <a:cs typeface="Calibri" pitchFamily="34" charset="-120"/>
+              </a:rPr>
+              <a:t> convergence</a:t>
+            </a:r>
+          </a:p>
+          <a:p>
+            <a:pPr marL="285750" indent="-285750">
               <a:spcAft>
                 <a:spcPts val="300"/>
               </a:spcAft>
               <a:buSzPct val="100000"/>
+              <a:buFont typeface="Arial" panose="020B0604020202020204" pitchFamily="34" charset="0"/>
               <a:buChar char="•"/>
             </a:pPr>
             <a:r>
@@ -1825,7 +1933,7 @@
                 <a:ea typeface="Calibri" pitchFamily="34" charset="-122"/>
                 <a:cs typeface="Calibri" pitchFamily="34" charset="-120"/>
               </a:rPr>
-              <a:t>Output interpretation - DeepChem GNN clinical relevance scoring</a:t>
+              <a:t>Quantum execution - PennyLane VQE (3A) · IBM Heron r3 (3B)</a:t>
             </a:r>
             <a:endParaRPr lang="en-US" dirty="0"/>
           </a:p>
@@ -1840,7 +1948,7 @@
         <p:spPr>
           <a:xfrm>
             <a:off x="10561320" y="8951976"/>
-            <a:ext cx="11795760" cy="1371600"/>
+            <a:ext cx="11795760" cy="1563624"/>
           </a:xfrm>
           <a:prstGeom prst="rect">
             <a:avLst/>
@@ -1871,7 +1979,7 @@
         </p:nvSpPr>
         <p:spPr>
           <a:xfrm>
-            <a:off x="10725912" y="8997696"/>
+            <a:off x="10725912" y="8948080"/>
             <a:ext cx="11521440" cy="365760"/>
           </a:xfrm>
           <a:prstGeom prst="rect">
@@ -1921,8 +2029,8 @@
         </p:nvSpPr>
         <p:spPr>
           <a:xfrm>
-            <a:off x="10725912" y="9363456"/>
-            <a:ext cx="11521440" cy="914400"/>
+            <a:off x="10725912" y="9205633"/>
+            <a:ext cx="10801678" cy="1247263"/>
           </a:xfrm>
           <a:prstGeom prst="rect">
             <a:avLst/>
@@ -1942,17 +2050,60 @@
               <a:buChar char="•"/>
             </a:pPr>
             <a:r>
-              <a:rPr lang="en-US" dirty="0">
-                <a:solidFill>
-                  <a:srgbClr val="1F1409"/>
-                </a:solidFill>
-                <a:latin typeface="Calibri" pitchFamily="34" charset="0"/>
-                <a:ea typeface="Calibri" pitchFamily="34" charset="-122"/>
-                <a:cs typeface="Calibri" pitchFamily="34" charset="-120"/>
-              </a:rPr>
-              <a:t>IBM Heron r3 · 156 qubits · heavy-hex lattice · ~350 µs T2, improved gate/readout fidelity (r3 ibm_pittsburgh, IBM Quantum 2026)</a:t>
-            </a:r>
-            <a:endParaRPr lang="en-US" dirty="0"/>
+              <a:rPr lang="en-US" sz="1600" dirty="0">
+                <a:solidFill>
+                  <a:srgbClr val="1F1409"/>
+                </a:solidFill>
+                <a:latin typeface="Calibri" pitchFamily="34" charset="0"/>
+                <a:ea typeface="Calibri" pitchFamily="34" charset="-122"/>
+                <a:cs typeface="Calibri" pitchFamily="34" charset="-120"/>
+              </a:rPr>
+              <a:t>IBM Heron r3 · 156 qubits · heavy-hex lattice · improved gate/readout fidelity (IBM Quantum 2026,</a:t>
+            </a:r>
+            <a:r>
+              <a:rPr lang="he-IL" sz="1600" dirty="0">
+                <a:solidFill>
+                  <a:srgbClr val="1F1409"/>
+                </a:solidFill>
+                <a:latin typeface="Calibri" pitchFamily="34" charset="0"/>
+                <a:ea typeface="Calibri" pitchFamily="34" charset="-122"/>
+                <a:cs typeface="Calibri" pitchFamily="34" charset="-120"/>
+              </a:rPr>
+              <a:t> </a:t>
+            </a:r>
+            <a:r>
+              <a:rPr lang="en-US" sz="1600" dirty="0">
+                <a:solidFill>
+                  <a:srgbClr val="1F1409"/>
+                </a:solidFill>
+                <a:latin typeface="Calibri" pitchFamily="34" charset="0"/>
+                <a:ea typeface="Calibri" pitchFamily="34" charset="-122"/>
+                <a:cs typeface="Calibri" pitchFamily="34" charset="-120"/>
+              </a:rPr>
+              <a:t>r3 </a:t>
+            </a:r>
+            <a:r>
+              <a:rPr lang="en-US" sz="1600" dirty="0" err="1">
+                <a:solidFill>
+                  <a:srgbClr val="1F1409"/>
+                </a:solidFill>
+                <a:latin typeface="Calibri" pitchFamily="34" charset="0"/>
+                <a:ea typeface="Calibri" pitchFamily="34" charset="-122"/>
+                <a:cs typeface="Calibri" pitchFamily="34" charset="-120"/>
+              </a:rPr>
+              <a:t>ibm_pittsburgh</a:t>
+            </a:r>
+            <a:r>
+              <a:rPr lang="en-US" sz="1600" dirty="0">
+                <a:solidFill>
+                  <a:srgbClr val="1F1409"/>
+                </a:solidFill>
+                <a:latin typeface="Calibri" pitchFamily="34" charset="0"/>
+                <a:ea typeface="Calibri" pitchFamily="34" charset="-122"/>
+                <a:cs typeface="Calibri" pitchFamily="34" charset="-120"/>
+              </a:rPr>
+              <a:t>)</a:t>
+            </a:r>
           </a:p>
           <a:p>
             <a:pPr marL="342900" indent="-342900">
@@ -1963,7 +2114,7 @@
               <a:buChar char="•"/>
             </a:pPr>
             <a:r>
-              <a:rPr lang="en-US" dirty="0" err="1">
+              <a:rPr lang="en-US" sz="1600" dirty="0" err="1">
                 <a:solidFill>
                   <a:srgbClr val="1F1409"/>
                 </a:solidFill>
@@ -1974,17 +2125,38 @@
               <a:t>SqDRIFT</a:t>
             </a:r>
             <a:r>
-              <a:rPr lang="en-US" dirty="0">
-                <a:solidFill>
-                  <a:srgbClr val="1F1409"/>
-                </a:solidFill>
-                <a:latin typeface="Calibri" pitchFamily="34" charset="0"/>
-                <a:ea typeface="Calibri" pitchFamily="34" charset="-122"/>
-                <a:cs typeface="Calibri" pitchFamily="34" charset="-120"/>
-              </a:rPr>
-              <a:t> - sample-based quantum diagonalization (Trotterized, stochastic drift)</a:t>
-            </a:r>
-            <a:endParaRPr lang="en-US" dirty="0"/>
+              <a:rPr lang="en-US" sz="1600" dirty="0">
+                <a:solidFill>
+                  <a:srgbClr val="1F1409"/>
+                </a:solidFill>
+                <a:latin typeface="Calibri" pitchFamily="34" charset="0"/>
+                <a:ea typeface="Calibri" pitchFamily="34" charset="-122"/>
+                <a:cs typeface="Calibri" pitchFamily="34" charset="-120"/>
+              </a:rPr>
+              <a:t> - sample-based quantum diagonalization (</a:t>
+            </a:r>
+            <a:r>
+              <a:rPr lang="en-US" sz="1600" dirty="0" err="1">
+                <a:solidFill>
+                  <a:srgbClr val="1F1409"/>
+                </a:solidFill>
+                <a:latin typeface="Calibri" pitchFamily="34" charset="0"/>
+                <a:ea typeface="Calibri" pitchFamily="34" charset="-122"/>
+                <a:cs typeface="Calibri" pitchFamily="34" charset="-120"/>
+              </a:rPr>
+              <a:t>Trotterized</a:t>
+            </a:r>
+            <a:r>
+              <a:rPr lang="en-US" sz="1600" dirty="0">
+                <a:solidFill>
+                  <a:srgbClr val="1F1409"/>
+                </a:solidFill>
+                <a:latin typeface="Calibri" pitchFamily="34" charset="0"/>
+                <a:ea typeface="Calibri" pitchFamily="34" charset="-122"/>
+                <a:cs typeface="Calibri" pitchFamily="34" charset="-120"/>
+              </a:rPr>
+              <a:t>, stochastic drift)</a:t>
+            </a:r>
           </a:p>
           <a:p>
             <a:pPr marL="342900" indent="-342900">
@@ -1995,7 +2167,7 @@
               <a:buChar char="•"/>
             </a:pPr>
             <a:r>
-              <a:rPr lang="en-US" dirty="0">
+              <a:rPr lang="en-US" sz="1600" dirty="0">
                 <a:solidFill>
                   <a:srgbClr val="1F1409"/>
                 </a:solidFill>
@@ -2005,7 +2177,6 @@
               </a:rPr>
               <a:t>Empirical anchor: 32-electron / 100-qubit C₁₃Cl₂ benchmark (IBM Research 2026, arXiv:2603.08696)</a:t>
             </a:r>
-            <a:endParaRPr lang="en-US" dirty="0"/>
           </a:p>
           <a:p>
             <a:pPr marL="342900" indent="-342900">
@@ -2015,78 +2186,17 @@
               <a:buSzPct val="100000"/>
               <a:buChar char="•"/>
             </a:pPr>
-            <a:endParaRPr lang="en-US" dirty="0"/>
-            <a:r>
-              <a:rPr lang="en-US" dirty="0">
-                <a:solidFill>
-                  <a:srgbClr val="1F1409"/>
-                </a:solidFill>
-                <a:latin typeface="Calibri" pitchFamily="34" charset="0"/>
-                <a:ea typeface="Calibri" pitchFamily="34" charset="-122"/>
-                <a:cs typeface="Calibri" pitchFamily="34" charset="-120"/>
-              </a:rPr>
-              <a:t>IBM $10B+ roadmap · Starling 2029: 200 logical qubits · C275F (88q) within trajectory</a:t>
-            </a:r>
-          </a:p>
-          <a:p>
-            <a:r>
-              <a:t>Heron r3 spec: IBM Quantum, Processor types &amp; 2026-01 product update (ibm_pittsburgh).</a:t>
-            </a:r>
-          </a:p>
-        </p:txBody>
-      </p:sp>
-      <p:sp>
-        <p:nvSpPr>
-          <p:cNvPr id="31" name="Text 26"/>
-          <p:cNvSpPr/>
-          <p:nvPr/>
-        </p:nvSpPr>
-        <p:spPr>
-          <a:xfrm>
-            <a:off x="10561320" y="10433304"/>
-            <a:ext cx="11795760" cy="365760"/>
-          </a:xfrm>
-          <a:prstGeom prst="rect">
-            <a:avLst/>
-          </a:prstGeom>
-          <a:noFill/>
-          <a:ln w="15875">
-            <a:solidFill>
-              <a:srgbClr val="C00000"/>
-            </a:solidFill>
-            <a:prstDash val="lgDash"/>
-          </a:ln>
-        </p:spPr>
-        <p:txBody>
-          <a:bodyPr wrap="square" lIns="0" tIns="0" rIns="0" bIns="0" rtlCol="0" anchor="ctr"/>
-          <a:lstStyle/>
-          <a:p>
-            <a:pPr marL="0" indent="0" algn="ctr">
-              <a:buNone/>
-            </a:pPr>
-            <a:r>
-              <a:rPr lang="en-US" sz="1600" b="1" kern="0" spc="300" dirty="0">
-                <a:solidFill>
-                  <a:srgbClr val="5C4A37"/>
-                </a:solidFill>
-                <a:latin typeface="Calibri" pitchFamily="34" charset="0"/>
-                <a:ea typeface="Calibri" pitchFamily="34" charset="-122"/>
-                <a:cs typeface="Calibri" pitchFamily="34" charset="-120"/>
-              </a:rPr>
-              <a:t>DSR PHASE 4 EVALUATION*  -  </a:t>
-            </a:r>
-            <a:r>
-              <a:rPr lang="en-US" sz="1600" i="1" dirty="0">
-                <a:solidFill>
-                  <a:srgbClr val="5C4A37"/>
-                </a:solidFill>
-                <a:latin typeface="Calibri" pitchFamily="34" charset="0"/>
-                <a:ea typeface="Calibri" pitchFamily="34" charset="-122"/>
-                <a:cs typeface="Calibri" pitchFamily="34" charset="-120"/>
-              </a:rPr>
-              <a:t>Triangulated · Pre-registered · n=4–6 expert panel</a:t>
-            </a:r>
-            <a:endParaRPr lang="en-US" sz="1600" dirty="0"/>
+            <a:r>
+              <a:rPr lang="en-US" sz="1600" dirty="0">
+                <a:solidFill>
+                  <a:srgbClr val="1F1409"/>
+                </a:solidFill>
+                <a:latin typeface="Calibri" pitchFamily="34" charset="0"/>
+                <a:ea typeface="Calibri" pitchFamily="34" charset="-122"/>
+                <a:cs typeface="Calibri" pitchFamily="34" charset="-120"/>
+              </a:rPr>
+              <a:t>IBM roadmap · Starling 2029: 200 logical qubits · C275F (24–56q) within trajectory</a:t>
+            </a:r>
           </a:p>
         </p:txBody>
       </p:sp>
@@ -2118,7 +2228,7 @@
           <a:bodyPr/>
           <a:lstStyle/>
           <a:p>
-            <a:pPr marL="0" algn="r" defTabSz="914400" rtl="1" eaLnBrk="1" latinLnBrk="0" hangingPunct="1"/>
+            <a:pPr marL="0" algn="l" defTabSz="914400" rtl="0" eaLnBrk="1" latinLnBrk="0" hangingPunct="1"/>
             <a:endParaRPr lang="en-US"/>
           </a:p>
         </p:txBody>
@@ -2224,8 +2334,8 @@
         </p:nvSpPr>
         <p:spPr>
           <a:xfrm>
-            <a:off x="23180040" y="5984548"/>
-            <a:ext cx="8961120" cy="1371600"/>
+            <a:off x="23180039" y="5984548"/>
+            <a:ext cx="8100061" cy="1371600"/>
           </a:xfrm>
           <a:prstGeom prst="rect">
             <a:avLst/>
@@ -2237,9 +2347,6 @@
           <a:bodyPr wrap="square" lIns="0" tIns="0" rIns="0" bIns="0" rtlCol="0" anchor="ctr"/>
           <a:lstStyle/>
           <a:p>
-            <a:pPr marL="0" indent="0">
-              <a:buNone/>
-            </a:pPr>
             <a:r>
               <a:rPr lang="en-US" sz="2000" dirty="0">
                 <a:solidFill>
@@ -2271,7 +2378,7 @@
                 <a:ea typeface="Calibri" pitchFamily="34" charset="-122"/>
                 <a:cs typeface="Calibri" pitchFamily="34" charset="-120"/>
               </a:rPr>
-              <a:t>. 3D molecular viewer · 7 validated core mutations · four-screen workflow.</a:t>
+              <a:t>. 3D molecular viewer · 8 DMRG-classified targets · six-screen workflow.</a:t>
             </a:r>
             <a:endParaRPr lang="en-US" sz="2000" dirty="0"/>
           </a:p>
@@ -2285,8 +2392,8 @@
         </p:nvSpPr>
         <p:spPr>
           <a:xfrm>
-            <a:off x="23180040" y="7481380"/>
-            <a:ext cx="8961120" cy="2103120"/>
+            <a:off x="23180040" y="7181313"/>
+            <a:ext cx="8961120" cy="2754707"/>
           </a:xfrm>
           <a:prstGeom prst="rect">
             <a:avLst/>
@@ -2314,7 +2421,7 @@
                 <a:ea typeface="Calibri" pitchFamily="34" charset="-122"/>
                 <a:cs typeface="Calibri" pitchFamily="34" charset="-120"/>
               </a:rPr>
-              <a:t>7 core mutations</a:t>
+              <a:t>8 DMRG-classified targets - </a:t>
             </a:r>
             <a:r>
               <a:rPr lang="en-US" sz="2000" dirty="0">
@@ -2325,7 +2432,7 @@
                 <a:ea typeface="Calibri" pitchFamily="34" charset="-122"/>
                 <a:cs typeface="Calibri" pitchFamily="34" charset="-120"/>
               </a:rPr>
-              <a:t> - TP53 C275F, KEAP1 LOF, KEAP1 G333C, KEAP1 R320Q, STK11 LKB1, STK11 F354L, STK11 D194N; extensible to 25+ tumor-suppressor genes (expansion pipeline)</a:t>
+              <a:t>TP53 C275F, R175H, G245S, R249S, R282W, KEAP1 G333C, STK11 D194N, SETD2 R1625C; all measured Class B.</a:t>
             </a:r>
             <a:endParaRPr lang="en-US" sz="2000" dirty="0"/>
           </a:p>
@@ -2378,7 +2485,7 @@
                 <a:ea typeface="Calibri" pitchFamily="34" charset="-122"/>
                 <a:cs typeface="Calibri" pitchFamily="34" charset="-120"/>
               </a:rPr>
-              <a:t>P1–P9 audit-trace emission</a:t>
+              <a:t>P1-P9 audit-trace emission</a:t>
             </a:r>
             <a:r>
               <a:rPr lang="en-US" sz="2000" dirty="0">
@@ -2453,7 +2560,29 @@
                 <a:ea typeface="Calibri" pitchFamily="34" charset="-122"/>
                 <a:cs typeface="Calibri" pitchFamily="34" charset="-120"/>
               </a:rPr>
-              <a:t> (Qiskit live · CUDA-Q-compatible design)</a:t>
+              <a:t> (</a:t>
+            </a:r>
+            <a:r>
+              <a:rPr lang="en-US" sz="2000" dirty="0" err="1">
+                <a:solidFill>
+                  <a:srgbClr val="1F1409"/>
+                </a:solidFill>
+                <a:latin typeface="Calibri" pitchFamily="34" charset="0"/>
+                <a:ea typeface="Calibri" pitchFamily="34" charset="-122"/>
+                <a:cs typeface="Calibri" pitchFamily="34" charset="-120"/>
+              </a:rPr>
+              <a:t>Qiskit</a:t>
+            </a:r>
+            <a:r>
+              <a:rPr lang="en-US" sz="2000" dirty="0">
+                <a:solidFill>
+                  <a:srgbClr val="1F1409"/>
+                </a:solidFill>
+                <a:latin typeface="Calibri" pitchFamily="34" charset="0"/>
+                <a:ea typeface="Calibri" pitchFamily="34" charset="-122"/>
+                <a:cs typeface="Calibri" pitchFamily="34" charset="-120"/>
+              </a:rPr>
+              <a:t> live today · CUDA-Q-compatible for Heron r3)</a:t>
             </a:r>
             <a:endParaRPr lang="en-US" sz="2000" dirty="0"/>
           </a:p>
@@ -2506,7 +2635,7 @@
         </p:nvSpPr>
         <p:spPr>
           <a:xfrm>
-            <a:off x="457200" y="10881360"/>
+            <a:off x="499755" y="10879878"/>
             <a:ext cx="16002000" cy="5394960"/>
           </a:xfrm>
           <a:prstGeom prst="rect">
@@ -2526,6 +2655,7 @@
           <a:bodyPr/>
           <a:lstStyle/>
           <a:p>
+            <a:pPr marL="0" algn="r" defTabSz="914400" rtl="1" eaLnBrk="1" latinLnBrk="0" hangingPunct="1"/>
             <a:endParaRPr lang="en-US"/>
           </a:p>
         </p:txBody>
@@ -2808,7 +2938,7 @@
                 <a:ea typeface="Calibri" pitchFamily="34" charset="-122"/>
                 <a:cs typeface="Calibri" pitchFamily="34" charset="-120"/>
               </a:rPr>
-              <a:t>~88-qubit BQP target </a:t>
+              <a:t>24–56-qubit BQP target </a:t>
             </a:r>
             <a:r>
               <a:rPr lang="en-US" sz="2000" dirty="0">
@@ -2833,8 +2963,8 @@
         </p:nvSpPr>
         <p:spPr>
           <a:xfrm>
-            <a:off x="16687800" y="10881360"/>
-            <a:ext cx="15773400" cy="5394960"/>
+            <a:off x="16821795" y="10908792"/>
+            <a:ext cx="15773400" cy="5861947"/>
           </a:xfrm>
           <a:prstGeom prst="rect">
             <a:avLst/>
@@ -2853,6 +2983,7 @@
           <a:bodyPr/>
           <a:lstStyle/>
           <a:p>
+            <a:pPr marL="0" algn="r" defTabSz="914400" rtl="1" eaLnBrk="1" latinLnBrk="0" hangingPunct="1"/>
             <a:endParaRPr lang="en-US"/>
           </a:p>
         </p:txBody>
@@ -2952,29 +3083,6 @@
           </a:p>
         </p:txBody>
       </p:sp>
-      <p:pic>
-        <p:nvPicPr>
-          <p:cNvPr id="47" name="Image 4" descr="benchmarking.jpg"/>
-          <p:cNvPicPr>
-            <a:picLocks noChangeAspect="1"/>
-          </p:cNvPicPr>
-          <p:nvPr/>
-        </p:nvPicPr>
-        <p:blipFill>
-          <a:blip r:embed="rId6"/>
-          <a:srcRect/>
-          <a:stretch/>
-        </p:blipFill>
-        <p:spPr>
-          <a:xfrm>
-            <a:off x="24551640" y="11649456"/>
-            <a:ext cx="7635239" cy="4489703"/>
-          </a:xfrm>
-          <a:prstGeom prst="rect">
-            <a:avLst/>
-          </a:prstGeom>
-        </p:spPr>
-      </p:pic>
       <p:sp>
         <p:nvSpPr>
           <p:cNvPr id="48" name="Text 41"/>
@@ -3094,7 +3202,7 @@
                 <a:ea typeface="Calibri" pitchFamily="34" charset="-122"/>
                 <a:cs typeface="Calibri" pitchFamily="34" charset="-120"/>
               </a:rPr>
-              <a:t>sqDRIFT (Phase 3B target)</a:t>
+              <a:t>sqDRIFT</a:t>
             </a:r>
             <a:r>
               <a:rPr lang="en-US" sz="2000" b="1" dirty="0">
@@ -3105,7 +3213,7 @@
                 <a:ea typeface="Calibri" pitchFamily="34" charset="-122"/>
                 <a:cs typeface="Calibri" pitchFamily="34" charset="-120"/>
               </a:rPr>
-              <a:t>:</a:t>
+              <a:t> (Phase 3B target):</a:t>
             </a:r>
             <a:r>
               <a:rPr lang="en-US" sz="2000" dirty="0">
@@ -3116,7 +3224,7 @@
                 <a:ea typeface="Calibri" pitchFamily="34" charset="-122"/>
                 <a:cs typeface="Calibri" pitchFamily="34" charset="-120"/>
               </a:rPr>
-              <a:t> −11.7 kcal/mol  (0.5 error - within chemical accuracy)</a:t>
+              <a:t> ≤1 kcal/mol error</a:t>
             </a:r>
             <a:endParaRPr lang="en-US" sz="2000" dirty="0"/>
           </a:p>
@@ -3198,24 +3306,8 @@
                 <a:ea typeface="Calibri" pitchFamily="34" charset="-122"/>
                 <a:cs typeface="Calibri" pitchFamily="34" charset="-120"/>
               </a:rPr>
-              <a:t> is itself an original IT contribution (§06.i).</a:t>
-            </a:r>
-          </a:p>
-          <a:p>
-            <a:pPr marL="0" indent="0">
-              <a:buNone/>
-            </a:pPr>
-            <a:r>
-              <a:rPr lang="en-US" sz="1600" i="1" dirty="0">
-                <a:solidFill>
-                  <a:srgbClr val="1F1409"/>
-                </a:solidFill>
-                <a:latin typeface="Calibri" pitchFamily="34" charset="0"/>
-                <a:cs typeface="Calibri" pitchFamily="34" charset="-120"/>
-              </a:rPr>
-              <a:t>*Illustrative figures · Chemical accuracy threshold: ≤1 kcal/mol</a:t>
-            </a:r>
-            <a:endParaRPr lang="en-US" sz="1600" dirty="0"/>
+              <a:t> is itself an original IT contribution.</a:t>
+            </a:r>
           </a:p>
         </p:txBody>
       </p:sp>
@@ -3247,6 +3339,7 @@
           <a:bodyPr/>
           <a:lstStyle/>
           <a:p>
+            <a:pPr marL="0" algn="r" defTabSz="914400" rtl="1" eaLnBrk="1" latinLnBrk="0" hangingPunct="1"/>
             <a:endParaRPr lang="en-US"/>
           </a:p>
         </p:txBody>
@@ -3259,7 +3352,7 @@
         </p:nvSpPr>
         <p:spPr>
           <a:xfrm>
-            <a:off x="777240" y="16779240"/>
+            <a:off x="777240" y="16700862"/>
             <a:ext cx="15361920" cy="457200"/>
           </a:xfrm>
           <a:prstGeom prst="rect">
@@ -3298,7 +3391,7 @@
         </p:nvSpPr>
         <p:spPr>
           <a:xfrm>
-            <a:off x="777240" y="17236440"/>
+            <a:off x="777240" y="17131936"/>
             <a:ext cx="15361920" cy="640080"/>
           </a:xfrm>
           <a:prstGeom prst="rect">
@@ -3337,8 +3430,8 @@
         </p:nvSpPr>
         <p:spPr>
           <a:xfrm>
-            <a:off x="777239" y="17772012"/>
-            <a:ext cx="10234472" cy="2103120"/>
+            <a:off x="777239" y="17662701"/>
+            <a:ext cx="14231984" cy="2103120"/>
           </a:xfrm>
           <a:prstGeom prst="rect">
             <a:avLst/>
@@ -3358,7 +3451,7 @@
               <a:buChar char="•"/>
             </a:pPr>
             <a:r>
-              <a:rPr lang="en-US" sz="2000" b="1" dirty="0">
+              <a:rPr lang="en-US" b="1" dirty="0">
                 <a:solidFill>
                   <a:srgbClr val="1F1409"/>
                 </a:solidFill>
@@ -3369,7 +3462,7 @@
               <a:t>Phase 1 · Foundation</a:t>
             </a:r>
             <a:r>
-              <a:rPr lang="en-US" sz="2000" dirty="0">
+              <a:rPr lang="en-US" dirty="0">
                 <a:solidFill>
                   <a:srgbClr val="1F1409"/>
                 </a:solidFill>
@@ -3380,7 +3473,7 @@
               <a:t> - NGS · BQP-relevance · active-space scoping  </a:t>
             </a:r>
             <a:r>
-              <a:rPr lang="en-US" sz="2000" i="1" dirty="0">
+              <a:rPr lang="en-US" i="1" dirty="0">
                 <a:solidFill>
                   <a:srgbClr val="2E7D32"/>
                 </a:solidFill>
@@ -3390,7 +3483,7 @@
               </a:rPr>
               <a:t>✓ complete</a:t>
             </a:r>
-            <a:endParaRPr lang="en-US" sz="2000" dirty="0"/>
+            <a:endParaRPr lang="en-US" dirty="0"/>
           </a:p>
           <a:p>
             <a:pPr marL="342900" indent="-342900">
@@ -3401,7 +3494,7 @@
               <a:buChar char="•"/>
             </a:pPr>
             <a:r>
-              <a:rPr lang="en-US" sz="2000" b="1" dirty="0">
+              <a:rPr lang="en-US" b="1" dirty="0">
                 <a:solidFill>
                   <a:srgbClr val="1F1409"/>
                 </a:solidFill>
@@ -3412,7 +3505,7 @@
               <a:t>Phase 2 · Architecture</a:t>
             </a:r>
             <a:r>
-              <a:rPr lang="en-US" sz="2000" dirty="0">
+              <a:rPr lang="en-US" dirty="0">
                 <a:solidFill>
                   <a:srgbClr val="1F1409"/>
                 </a:solidFill>
@@ -3423,7 +3516,7 @@
               <a:t> - Workflow spec · React/Three.js prototype  </a:t>
             </a:r>
             <a:r>
-              <a:rPr lang="en-US" sz="2000" i="1" dirty="0">
+              <a:rPr lang="en-US" i="1" dirty="0">
                 <a:solidFill>
                   <a:srgbClr val="2E7D32"/>
                 </a:solidFill>
@@ -3433,7 +3526,7 @@
               </a:rPr>
               <a:t>✓ complete</a:t>
             </a:r>
-            <a:endParaRPr lang="en-US" sz="2000" dirty="0"/>
+            <a:endParaRPr lang="en-US" dirty="0"/>
           </a:p>
           <a:p>
             <a:pPr marL="342900" indent="-342900">
@@ -3444,7 +3537,7 @@
               <a:buChar char="•"/>
             </a:pPr>
             <a:r>
-              <a:rPr lang="en-US" sz="2000" b="1" dirty="0">
+              <a:rPr lang="en-US" b="1" dirty="0">
                 <a:solidFill>
                   <a:srgbClr val="1F1409"/>
                 </a:solidFill>
@@ -3455,17 +3548,50 @@
               <a:t>Phase 3A · Live Circuit</a:t>
             </a:r>
             <a:r>
-              <a:rPr lang="en-US" sz="2000" dirty="0">
-                <a:solidFill>
-                  <a:srgbClr val="1F1409"/>
-                </a:solidFill>
-                <a:latin typeface="Calibri" pitchFamily="34" charset="0"/>
-                <a:ea typeface="Calibri" pitchFamily="34" charset="-122"/>
-                <a:cs typeface="Calibri" pitchFamily="34" charset="-120"/>
-              </a:rPr>
-              <a:t> - PennyLane 4-qubit live VQE + ~20e/40q HPC intermediate (NSF ACCESS / USC CARC) · PySCF JW Hamiltonian · May-Aug 2026</a:t>
-            </a:r>
-            <a:endParaRPr lang="en-US" sz="2000" dirty="0"/>
+              <a:rPr lang="en-US" dirty="0">
+                <a:solidFill>
+                  <a:srgbClr val="1F1409"/>
+                </a:solidFill>
+                <a:latin typeface="Calibri" pitchFamily="34" charset="0"/>
+                <a:ea typeface="Calibri" pitchFamily="34" charset="-122"/>
+                <a:cs typeface="Calibri" pitchFamily="34" charset="-120"/>
+              </a:rPr>
+              <a:t> - PennyLane 4-qubit live VQE + 20e/40q HPC run, both complete (LEON-sealed, 2026-08-04) · </a:t>
+            </a:r>
+            <a:r>
+              <a:rPr lang="en-US" dirty="0" err="1">
+                <a:solidFill>
+                  <a:srgbClr val="1F1409"/>
+                </a:solidFill>
+                <a:latin typeface="Calibri" pitchFamily="34" charset="0"/>
+                <a:ea typeface="Calibri" pitchFamily="34" charset="-122"/>
+                <a:cs typeface="Calibri" pitchFamily="34" charset="-120"/>
+              </a:rPr>
+              <a:t>PySCF</a:t>
+            </a:r>
+            <a:r>
+              <a:rPr lang="en-US" dirty="0">
+                <a:solidFill>
+                  <a:srgbClr val="1F1409"/>
+                </a:solidFill>
+                <a:latin typeface="Calibri" pitchFamily="34" charset="0"/>
+                <a:ea typeface="Calibri" pitchFamily="34" charset="-122"/>
+                <a:cs typeface="Calibri" pitchFamily="34" charset="-120"/>
+              </a:rPr>
+              <a:t> JW Hamiltonian </a:t>
+            </a:r>
+            <a:r>
+              <a:rPr lang="en-US" i="1" dirty="0">
+                <a:solidFill>
+                  <a:srgbClr val="2E7D32"/>
+                </a:solidFill>
+                <a:latin typeface="Calibri" pitchFamily="34" charset="0"/>
+                <a:ea typeface="Calibri" pitchFamily="34" charset="-122"/>
+                <a:cs typeface="Calibri" pitchFamily="34" charset="-120"/>
+              </a:rPr>
+              <a:t>✓ complete</a:t>
+            </a:r>
+            <a:endParaRPr lang="en-US" dirty="0"/>
           </a:p>
           <a:p>
             <a:pPr marL="342900" indent="-342900">
@@ -3476,7 +3602,7 @@
               <a:buChar char="•"/>
             </a:pPr>
             <a:r>
-              <a:rPr lang="en-US" sz="2000" b="1" dirty="0">
+              <a:rPr lang="en-US" b="1" dirty="0">
                 <a:solidFill>
                   <a:srgbClr val="1F1409"/>
                 </a:solidFill>
@@ -3487,17 +3613,28 @@
               <a:t>Phase 3B · Heron r3</a:t>
             </a:r>
             <a:r>
-              <a:rPr lang="en-US" sz="2000" dirty="0">
-                <a:solidFill>
-                  <a:srgbClr val="1F1409"/>
-                </a:solidFill>
-                <a:latin typeface="Calibri" pitchFamily="34" charset="0"/>
-                <a:ea typeface="Calibri" pitchFamily="34" charset="-122"/>
-                <a:cs typeface="Calibri" pitchFamily="34" charset="-120"/>
-              </a:rPr>
-              <a:t>Full ~88-qubit active site · C275F only · proven feasible (94q, Merz et al. 2026) · KEAP1/STK11: fault-tolerant QPU (~2030+) · 152–310q · PDB-verified</a:t>
-            </a:r>
-            <a:endParaRPr lang="en-US" sz="2000" dirty="0"/>
+              <a:rPr lang="he-IL" b="1" dirty="0">
+                <a:solidFill>
+                  <a:srgbClr val="1F1409"/>
+                </a:solidFill>
+                <a:latin typeface="Calibri" pitchFamily="34" charset="0"/>
+                <a:ea typeface="Calibri" pitchFamily="34" charset="-122"/>
+                <a:cs typeface="Calibri" pitchFamily="34" charset="-120"/>
+              </a:rPr>
+              <a:t> - </a:t>
+            </a:r>
+            <a:r>
+              <a:rPr lang="en-US" dirty="0">
+                <a:solidFill>
+                  <a:srgbClr val="1F1409"/>
+                </a:solidFill>
+                <a:latin typeface="Calibri" pitchFamily="34" charset="0"/>
+                <a:ea typeface="Calibri" pitchFamily="34" charset="-122"/>
+                <a:cs typeface="Calibri" pitchFamily="34" charset="-120"/>
+              </a:rPr>
+              <a:t>C275F: 24–56q active site, DMRG Class B · proven feasible (94q, Merz et al. 2026) · KEAP1/STK11: current-era, 32–74q, DMRG Class B · PDB-verified</a:t>
+            </a:r>
+            <a:endParaRPr lang="en-US" dirty="0"/>
           </a:p>
           <a:p>
             <a:pPr marL="342900" indent="-342900">
@@ -3508,7 +3645,7 @@
               <a:buChar char="•"/>
             </a:pPr>
             <a:r>
-              <a:rPr lang="en-US" sz="2000" b="1" dirty="0">
+              <a:rPr lang="en-US" b="1" dirty="0">
                 <a:solidFill>
                   <a:srgbClr val="1F1409"/>
                 </a:solidFill>
@@ -3519,7 +3656,7 @@
               <a:t>Phase 4 · DSR Evaluation</a:t>
             </a:r>
             <a:r>
-              <a:rPr lang="en-US" sz="2000" dirty="0">
+              <a:rPr lang="en-US" dirty="0">
                 <a:solidFill>
                   <a:srgbClr val="1F1409"/>
                 </a:solidFill>
@@ -3529,7 +3666,7 @@
               </a:rPr>
               <a:t> - 4 layers · OSF pre-registered · n=4-6 panel · Jan-Apr 2027</a:t>
             </a:r>
-            <a:endParaRPr lang="en-US" sz="2000" dirty="0"/>
+            <a:endParaRPr lang="en-US" dirty="0"/>
           </a:p>
           <a:p>
             <a:pPr marL="342900" indent="-342900">
@@ -3540,7 +3677,7 @@
               <a:buChar char="•"/>
             </a:pPr>
             <a:r>
-              <a:rPr lang="en-US" sz="2000" b="1" dirty="0">
+              <a:rPr lang="en-US" b="1" dirty="0">
                 <a:solidFill>
                   <a:srgbClr val="1F1409"/>
                 </a:solidFill>
@@ -3551,7 +3688,7 @@
               <a:t>Phase 5 · Synthesis &amp; Defense</a:t>
             </a:r>
             <a:r>
-              <a:rPr lang="en-US" sz="2000" dirty="0">
+              <a:rPr lang="en-US" dirty="0">
                 <a:solidFill>
                   <a:srgbClr val="1F1409"/>
                 </a:solidFill>
@@ -3561,7 +3698,7 @@
               </a:rPr>
               <a:t> - May-Dec 2027</a:t>
             </a:r>
-            <a:endParaRPr lang="en-US" sz="2000" dirty="0"/>
+            <a:endParaRPr lang="en-US" dirty="0"/>
           </a:p>
         </p:txBody>
       </p:sp>
@@ -3573,7 +3710,7 @@
         </p:nvSpPr>
         <p:spPr>
           <a:xfrm>
-            <a:off x="777240" y="19946148"/>
+            <a:off x="1143001" y="19905385"/>
             <a:ext cx="15270480" cy="320040"/>
           </a:xfrm>
           <a:prstGeom prst="rect">
@@ -3586,7 +3723,7 @@
           <a:bodyPr wrap="square" lIns="0" tIns="0" rIns="0" bIns="0" rtlCol="0" anchor="ctr"/>
           <a:lstStyle/>
           <a:p>
-            <a:pPr marL="0" indent="0" algn="l">
+            <a:pPr marL="0" indent="0" algn="ctr">
               <a:buNone/>
             </a:pPr>
             <a:r>
@@ -3612,7 +3749,7 @@
         </p:nvSpPr>
         <p:spPr>
           <a:xfrm>
-            <a:off x="16687800" y="16550640"/>
+            <a:off x="16827500" y="16652240"/>
             <a:ext cx="15773400" cy="3657600"/>
           </a:xfrm>
           <a:prstGeom prst="rect">
@@ -3632,7 +3769,7 @@
           <a:bodyPr/>
           <a:lstStyle/>
           <a:p>
-            <a:pPr marL="0" algn="r" defTabSz="914400" rtl="1" eaLnBrk="1" latinLnBrk="0" hangingPunct="1"/>
+            <a:pPr marL="0" algn="l" defTabSz="914400" rtl="0" eaLnBrk="1" latinLnBrk="0" hangingPunct="1"/>
             <a:endParaRPr lang="en-US"/>
           </a:p>
         </p:txBody>
@@ -3645,7 +3782,7 @@
         </p:nvSpPr>
         <p:spPr>
           <a:xfrm>
-            <a:off x="17007840" y="16779240"/>
+            <a:off x="17007840" y="16609421"/>
             <a:ext cx="15133320" cy="457200"/>
           </a:xfrm>
           <a:prstGeom prst="rect">
@@ -3684,7 +3821,7 @@
         </p:nvSpPr>
         <p:spPr>
           <a:xfrm>
-            <a:off x="17007841" y="17236440"/>
+            <a:off x="17007841" y="17040495"/>
             <a:ext cx="10149840" cy="868680"/>
           </a:xfrm>
           <a:prstGeom prst="rect">
@@ -3729,8 +3866,8 @@
         </p:nvSpPr>
         <p:spPr>
           <a:xfrm>
-            <a:off x="17007839" y="18054588"/>
-            <a:ext cx="12766307" cy="2194560"/>
+            <a:off x="17007839" y="17845580"/>
+            <a:ext cx="14767560" cy="2362660"/>
           </a:xfrm>
           <a:prstGeom prst="rect">
             <a:avLst/>
@@ -3750,38 +3887,25 @@
               <a:buChar char="•"/>
             </a:pPr>
             <a:r>
-              <a:rPr lang="en-US" sz="2000" b="1" dirty="0">
-                <a:solidFill>
-                  <a:srgbClr val="1F1409"/>
-                </a:solidFill>
-                <a:latin typeface="Calibri" pitchFamily="34" charset="0"/>
-                <a:cs typeface="Calibri" pitchFamily="34" charset="-120"/>
-              </a:rPr>
-              <a:t>Proposed </a:t>
-            </a:r>
-            <a:r>
-              <a:rPr lang="en-US" sz="2000" b="1" dirty="0">
-                <a:solidFill>
-                  <a:srgbClr val="1F1409"/>
-                </a:solidFill>
-                <a:latin typeface="Calibri" pitchFamily="34" charset="0"/>
-                <a:ea typeface="Calibri" pitchFamily="34" charset="-122"/>
-                <a:cs typeface="Calibri" pitchFamily="34" charset="-120"/>
-              </a:rPr>
-              <a:t>BQP-relevance classification</a:t>
-            </a:r>
-            <a:r>
-              <a:rPr lang="en-US" sz="2000" dirty="0">
-                <a:solidFill>
-                  <a:srgbClr val="1F1409"/>
-                </a:solidFill>
-                <a:latin typeface="Calibri" pitchFamily="34" charset="0"/>
-                <a:ea typeface="Calibri" pitchFamily="34" charset="-122"/>
-                <a:cs typeface="Calibri" pitchFamily="34" charset="-120"/>
-              </a:rPr>
-              <a:t> for non-druggable oncology targets - reusable across mutation classes</a:t>
-            </a:r>
-            <a:endParaRPr lang="en-US" sz="2000" dirty="0"/>
+              <a:rPr lang="en-US" b="1" dirty="0">
+                <a:solidFill>
+                  <a:srgbClr val="1F1409"/>
+                </a:solidFill>
+                <a:latin typeface="Calibri" pitchFamily="34" charset="0"/>
+                <a:cs typeface="Calibri" pitchFamily="34" charset="-120"/>
+              </a:rPr>
+              <a:t>Proposed BQP-relevance </a:t>
+            </a:r>
+            <a:r>
+              <a:rPr lang="en-US" dirty="0">
+                <a:solidFill>
+                  <a:srgbClr val="1F1409"/>
+                </a:solidFill>
+                <a:latin typeface="Calibri" pitchFamily="34" charset="0"/>
+                <a:cs typeface="Calibri" pitchFamily="34" charset="-120"/>
+              </a:rPr>
+              <a:t>classification for non-druggable oncology targets - reusable across mutation classes</a:t>
+            </a:r>
           </a:p>
           <a:p>
             <a:pPr marL="342900" indent="-342900">
@@ -3792,72 +3916,15 @@
               <a:buChar char="•"/>
             </a:pPr>
             <a:r>
-              <a:rPr lang="en-US" sz="2000" dirty="0">
-                <a:solidFill>
-                  <a:srgbClr val="1F1409"/>
-                </a:solidFill>
-                <a:latin typeface="Calibri" pitchFamily="34" charset="0"/>
-                <a:ea typeface="Calibri" pitchFamily="34" charset="-122"/>
-                <a:cs typeface="Calibri" pitchFamily="34" charset="-120"/>
-              </a:rPr>
-              <a:t>Unlike quantum-</a:t>
-            </a:r>
-            <a:r>
-              <a:rPr lang="en-US" sz="2000" i="1" dirty="0">
-                <a:solidFill>
-                  <a:srgbClr val="1F1409"/>
-                </a:solidFill>
-                <a:latin typeface="Calibri" pitchFamily="34" charset="0"/>
-                <a:ea typeface="Calibri" pitchFamily="34" charset="-122"/>
-                <a:cs typeface="Calibri" pitchFamily="34" charset="-120"/>
-              </a:rPr>
-              <a:t>enhanced</a:t>
-            </a:r>
-            <a:r>
-              <a:rPr lang="en-US" sz="2000" dirty="0">
-                <a:solidFill>
-                  <a:srgbClr val="1F1409"/>
-                </a:solidFill>
-                <a:latin typeface="Calibri" pitchFamily="34" charset="0"/>
-                <a:ea typeface="Calibri" pitchFamily="34" charset="-122"/>
-                <a:cs typeface="Calibri" pitchFamily="34" charset="-120"/>
-              </a:rPr>
-              <a:t> approaches targeting classically-tractable proteins (e.g. KRAS — Vakili et al., </a:t>
-            </a:r>
-            <a:r>
-              <a:rPr lang="en-US" sz="2000" i="1" dirty="0">
-                <a:solidFill>
-                  <a:srgbClr val="1F1409"/>
-                </a:solidFill>
-                <a:latin typeface="Calibri" pitchFamily="34" charset="0"/>
-                <a:ea typeface="Calibri" pitchFamily="34" charset="-122"/>
-                <a:cs typeface="Calibri" pitchFamily="34" charset="-120"/>
-              </a:rPr>
-              <a:t>Nature Biotechnology</a:t>
-            </a:r>
-            <a:r>
-              <a:rPr lang="en-US" sz="2000" dirty="0">
-                <a:solidFill>
-                  <a:srgbClr val="1F1409"/>
-                </a:solidFill>
-                <a:latin typeface="Calibri" pitchFamily="34" charset="0"/>
-                <a:ea typeface="Calibri" pitchFamily="34" charset="-122"/>
-                <a:cs typeface="Calibri" pitchFamily="34" charset="-120"/>
-              </a:rPr>
-              <a:t> 2025), classical methods here become computationally prohibitive at chemical accuracy</a:t>
-            </a:r>
-            <a:r>
-              <a:rPr lang="en-US" sz="2000" b="1" dirty="0">
-                <a:solidFill>
-                  <a:srgbClr val="1F1409"/>
-                </a:solidFill>
-                <a:latin typeface="Calibri" pitchFamily="34" charset="0"/>
-                <a:ea typeface="Calibri" pitchFamily="34" charset="-122"/>
-                <a:cs typeface="Calibri" pitchFamily="34" charset="-120"/>
-              </a:rPr>
-              <a:t/>
-            </a:r>
-            <a:endParaRPr lang="en-US" sz="2000" dirty="0"/>
+              <a:rPr lang="en-US" dirty="0">
+                <a:solidFill>
+                  <a:srgbClr val="1F1409"/>
+                </a:solidFill>
+                <a:latin typeface="Calibri" pitchFamily="34" charset="0"/>
+                <a:cs typeface="Calibri" pitchFamily="34" charset="-120"/>
+              </a:rPr>
+              <a:t>Unlike quantum-enhanced approaches targeting classically-tractable proteins (e.g. KRAS — Vakili et al., Nature Biotechnology 2025), quantum necessity here is established empirically, not assumed - a DMRG classifier tests every target before any quantum claim is made</a:t>
+            </a:r>
           </a:p>
           <a:p>
             <a:pPr marL="342900" indent="-342900">
@@ -3868,60 +3935,25 @@
               <a:buChar char="•"/>
             </a:pPr>
             <a:r>
-              <a:rPr lang="en-US" sz="2000" b="1" dirty="0">
-                <a:solidFill>
-                  <a:srgbClr val="1F1409"/>
-                </a:solidFill>
-                <a:latin typeface="Calibri" pitchFamily="34" charset="0"/>
-                <a:cs typeface="Calibri" pitchFamily="34" charset="-120"/>
-              </a:rPr>
-              <a:t>Novel</a:t>
-            </a:r>
-            <a:r>
-              <a:rPr lang="en-US" sz="2000" b="1" dirty="0">
-                <a:solidFill>
-                  <a:srgbClr val="1F1409"/>
-                </a:solidFill>
-                <a:latin typeface="Calibri" pitchFamily="34" charset="0"/>
-                <a:ea typeface="Calibri" pitchFamily="34" charset="-122"/>
-                <a:cs typeface="Calibri" pitchFamily="34" charset="-120"/>
-              </a:rPr>
-              <a:t> Part-11 compliance framework</a:t>
-            </a:r>
-            <a:r>
-              <a:rPr lang="en-US" sz="2000" dirty="0">
-                <a:solidFill>
-                  <a:srgbClr val="1F1409"/>
-                </a:solidFill>
-                <a:latin typeface="Calibri" pitchFamily="34" charset="0"/>
-                <a:ea typeface="Calibri" pitchFamily="34" charset="-122"/>
-                <a:cs typeface="Calibri" pitchFamily="34" charset="-120"/>
-              </a:rPr>
-              <a:t> for probabilistic quantum binding data (incl. </a:t>
-            </a:r>
-            <a:r>
-              <a:rPr lang="en-US" sz="2000" i="1" dirty="0">
-                <a:solidFill>
-                  <a:srgbClr val="C75A2E"/>
-                </a:solidFill>
-                <a:latin typeface="Calibri" pitchFamily="34" charset="0"/>
-                <a:ea typeface="Calibri" pitchFamily="34" charset="-122"/>
-                <a:cs typeface="Calibri" pitchFamily="34" charset="-120"/>
-              </a:rPr>
-              <a:t>P9 ML-decoder provenance</a:t>
-            </a:r>
-            <a:r>
-              <a:rPr lang="en-US" sz="2000" dirty="0">
-                <a:solidFill>
-                  <a:srgbClr val="1F1409"/>
-                </a:solidFill>
-                <a:latin typeface="Calibri" pitchFamily="34" charset="0"/>
-                <a:ea typeface="Calibri" pitchFamily="34" charset="-122"/>
-                <a:cs typeface="Calibri" pitchFamily="34" charset="-120"/>
-              </a:rPr>
-              <a:t>)</a:t>
-            </a:r>
-            <a:endParaRPr lang="en-US" sz="2000" dirty="0"/>
+              <a:rPr lang="en-US" b="1" dirty="0">
+                <a:solidFill>
+                  <a:srgbClr val="1F1409"/>
+                </a:solidFill>
+                <a:latin typeface="Calibri" pitchFamily="34" charset="0"/>
+                <a:cs typeface="Calibri" pitchFamily="34" charset="-120"/>
+              </a:rPr>
+              <a:t>Novel Part-11 compliance framework </a:t>
+            </a:r>
+            <a:r>
+              <a:rPr lang="en-US" dirty="0">
+                <a:solidFill>
+                  <a:srgbClr val="1F1409"/>
+                </a:solidFill>
+                <a:latin typeface="Calibri" pitchFamily="34" charset="0"/>
+                <a:cs typeface="Calibri" pitchFamily="34" charset="-120"/>
+              </a:rPr>
+              <a:t>for probabilistic quantum binding data (incl. P9 ML-decoder provenance)</a:t>
+            </a:r>
           </a:p>
           <a:p>
             <a:pPr marL="342900" indent="-342900">
@@ -3932,28 +3964,25 @@
               <a:buChar char="•"/>
             </a:pPr>
             <a:r>
-              <a:rPr lang="en-US" sz="2000" b="1" dirty="0">
-                <a:solidFill>
-                  <a:srgbClr val="1F1409"/>
-                </a:solidFill>
-                <a:latin typeface="Calibri" pitchFamily="34" charset="0"/>
-                <a:ea typeface="Calibri" pitchFamily="34" charset="-122"/>
-                <a:cs typeface="Calibri" pitchFamily="34" charset="-120"/>
-              </a:rPr>
-              <a:t>Bifurcation-aware orchestration</a:t>
-            </a:r>
-            <a:r>
-              <a:rPr lang="en-US" sz="2000" dirty="0">
-                <a:solidFill>
-                  <a:srgbClr val="1F1409"/>
-                </a:solidFill>
-                <a:latin typeface="Calibri" pitchFamily="34" charset="0"/>
-                <a:ea typeface="Calibri" pitchFamily="34" charset="-122"/>
-                <a:cs typeface="Calibri" pitchFamily="34" charset="-120"/>
-              </a:rPr>
-              <a:t> surviving the IBM-QCS vs Nvidia-NVQLink vendor split</a:t>
-            </a:r>
-            <a:endParaRPr lang="en-US" sz="2000" dirty="0"/>
+              <a:rPr lang="en-US" b="1" dirty="0">
+                <a:solidFill>
+                  <a:srgbClr val="1F1409"/>
+                </a:solidFill>
+                <a:latin typeface="Calibri" pitchFamily="34" charset="0"/>
+                <a:cs typeface="Calibri" pitchFamily="34" charset="-120"/>
+              </a:rPr>
+              <a:t>Bifurcation-aware orchestration </a:t>
+            </a:r>
+            <a:r>
+              <a:rPr lang="en-US" dirty="0">
+                <a:solidFill>
+                  <a:srgbClr val="1F1409"/>
+                </a:solidFill>
+                <a:latin typeface="Calibri" pitchFamily="34" charset="0"/>
+                <a:cs typeface="Calibri" pitchFamily="34" charset="-120"/>
+              </a:rPr>
+              <a:t>- CPU and GPU (NVIDIA L40S) backends both provisioned on Laguna; GPU path proven at benchmark scale, not yet production-scale</a:t>
+            </a:r>
           </a:p>
           <a:p>
             <a:pPr marL="342900" indent="-342900">
@@ -3964,73 +3993,46 @@
               <a:buChar char="•"/>
             </a:pPr>
             <a:r>
-              <a:rPr lang="en-US" sz="2000" b="1" dirty="0">
-                <a:solidFill>
-                  <a:srgbClr val="1F1409"/>
-                </a:solidFill>
-                <a:latin typeface="Calibri" pitchFamily="34" charset="0"/>
-                <a:ea typeface="Calibri" pitchFamily="34" charset="-122"/>
-                <a:cs typeface="Calibri" pitchFamily="34" charset="-120"/>
-              </a:rPr>
-              <a:t>Selective computational escalation</a:t>
-            </a:r>
-            <a:r>
-              <a:rPr lang="en-US" sz="2000" dirty="0">
-                <a:solidFill>
-                  <a:srgbClr val="1F1409"/>
-                </a:solidFill>
-                <a:latin typeface="Calibri" pitchFamily="34" charset="0"/>
-                <a:ea typeface="Calibri" pitchFamily="34" charset="-122"/>
-                <a:cs typeface="Calibri" pitchFamily="34" charset="-120"/>
-              </a:rPr>
-              <a:t> - formal routing of subproblems to AI / HPC / QC</a:t>
-            </a:r>
-            <a:endParaRPr lang="en-US" sz="2000" dirty="0"/>
-          </a:p>
-          <a:p>
-            <a:pPr marL="342900" indent="-342900">
-              <a:spcAft>
-                <a:spcPts val="400"/>
-              </a:spcAft>
-              <a:buSzPct val="100000"/>
-              <a:buChar char="•"/>
-            </a:pPr>
-            <a:r>
-              <a:rPr lang="en-US" sz="2000" b="1" i="1" dirty="0">
-                <a:solidFill>
-                  <a:srgbClr val="C7361A"/>
-                </a:solidFill>
-                <a:latin typeface="Calibri" pitchFamily="34" charset="0"/>
-                <a:ea typeface="Calibri" pitchFamily="34" charset="-122"/>
-                <a:cs typeface="Calibri" pitchFamily="34" charset="-120"/>
-              </a:rPr>
-              <a:t>Future research:</a:t>
-            </a:r>
-            <a:r>
-              <a:rPr lang="en-US" sz="2000" i="1" dirty="0">
-                <a:solidFill>
-                  <a:srgbClr val="1F1409"/>
-                </a:solidFill>
-                <a:latin typeface="Calibri" pitchFamily="34" charset="0"/>
-                <a:ea typeface="Calibri" pitchFamily="34" charset="-122"/>
-                <a:cs typeface="Calibri" pitchFamily="34" charset="-120"/>
-              </a:rPr>
-              <a:t> NGS-informed radiotherapy decision support (post-doc) - extending GARD-class radiogenomic models</a:t>
-            </a:r>
-            <a:endParaRPr lang="en-US" sz="2000" dirty="0"/>
-          </a:p>
-        </p:txBody>
-      </p:sp>
-      <p:sp>
-        <p:nvSpPr>
-          <p:cNvPr id="60" name="Text 53"/>
-          <p:cNvSpPr/>
-          <p:nvPr/>
-        </p:nvSpPr>
-        <p:spPr>
-          <a:xfrm>
-            <a:off x="457200" y="20299680"/>
-            <a:ext cx="11887200" cy="320040"/>
+              <a:rPr lang="en-US" b="1" dirty="0">
+                <a:solidFill>
+                  <a:srgbClr val="1F1409"/>
+                </a:solidFill>
+                <a:latin typeface="Calibri" pitchFamily="34" charset="0"/>
+                <a:cs typeface="Calibri" pitchFamily="34" charset="-120"/>
+              </a:rPr>
+              <a:t>Selective computational escalation </a:t>
+            </a:r>
+            <a:r>
+              <a:rPr lang="en-US" dirty="0">
+                <a:solidFill>
+                  <a:srgbClr val="1F1409"/>
+                </a:solidFill>
+                <a:latin typeface="Calibri" pitchFamily="34" charset="0"/>
+                <a:cs typeface="Calibri" pitchFamily="34" charset="-120"/>
+              </a:rPr>
+              <a:t>- formal routing of subproblems to AI / HPC / QC</a:t>
+            </a:r>
+            <a:endParaRPr lang="en-US" dirty="0">
+              <a:solidFill>
+                <a:srgbClr val="1F1409"/>
+              </a:solidFill>
+              <a:latin typeface="Calibri" pitchFamily="34" charset="0"/>
+              <a:ea typeface="Calibri" pitchFamily="34" charset="-122"/>
+              <a:cs typeface="Calibri" pitchFamily="34" charset="-120"/>
+            </a:endParaRPr>
+          </a:p>
+        </p:txBody>
+      </p:sp>
+      <p:sp>
+        <p:nvSpPr>
+          <p:cNvPr id="62" name="Text 55"/>
+          <p:cNvSpPr/>
+          <p:nvPr/>
+        </p:nvSpPr>
+        <p:spPr>
+          <a:xfrm>
+            <a:off x="14630399" y="20369349"/>
+            <a:ext cx="2272937" cy="914400"/>
           </a:xfrm>
           <a:prstGeom prst="rect">
             <a:avLst/>
@@ -4039,37 +4041,42 @@
           <a:ln/>
         </p:spPr>
         <p:txBody>
-          <a:bodyPr wrap="square" lIns="0" tIns="0" rIns="0" bIns="0" rtlCol="0" anchor="ctr"/>
-          <a:lstStyle/>
-          <a:p>
-            <a:pPr marL="0" indent="0">
+          <a:bodyPr wrap="square" lIns="0" tIns="0" rIns="0" bIns="0" rtlCol="0" anchor="ctr">
+            <a:normAutofit lnSpcReduction="10000"/>
+          </a:bodyPr>
+          <a:lstStyle/>
+          <a:p>
+            <a:pPr marL="0" indent="0" algn="ctr">
               <a:buNone/>
             </a:pPr>
             <a:r>
-              <a:rPr lang="en-US" sz="1600" b="1" kern="0" spc="500" dirty="0">
-                <a:solidFill>
-                  <a:srgbClr val="5C4A37"/>
-                </a:solidFill>
-                <a:latin typeface="Calibri" pitchFamily="34" charset="0"/>
-                <a:ea typeface="Calibri" pitchFamily="34" charset="-122"/>
-                <a:cs typeface="Calibri" pitchFamily="34" charset="-120"/>
-              </a:rPr>
-              <a:t>FUTURE RESEARCH DIRECTION</a:t>
-            </a:r>
-            <a:endParaRPr lang="en-US" sz="1600" dirty="0"/>
-          </a:p>
-        </p:txBody>
-      </p:sp>
-      <p:sp>
-        <p:nvSpPr>
-          <p:cNvPr id="61" name="Text 54"/>
-          <p:cNvSpPr/>
-          <p:nvPr/>
-        </p:nvSpPr>
-        <p:spPr>
-          <a:xfrm>
-            <a:off x="457200" y="20416065"/>
-            <a:ext cx="11887200" cy="1005840"/>
+              <a:rPr lang="he-IL" sz="6400" b="1" dirty="0">
+                <a:solidFill>
+                  <a:srgbClr val="C75A2E"/>
+                </a:solidFill>
+                <a:latin typeface="David" panose="020E0502060401010101" pitchFamily="34" charset="-79"/>
+                <a:ea typeface="Georgia" pitchFamily="34" charset="-122"/>
+                <a:cs typeface="David" panose="020E0502060401010101" pitchFamily="34" charset="-79"/>
+              </a:rPr>
+              <a:t>56</a:t>
+            </a:r>
+            <a:endParaRPr lang="en-US" sz="6400" dirty="0">
+              <a:latin typeface="David" panose="020E0502060401010101" pitchFamily="34" charset="-79"/>
+              <a:cs typeface="David" panose="020E0502060401010101" pitchFamily="34" charset="-79"/>
+            </a:endParaRPr>
+          </a:p>
+        </p:txBody>
+      </p:sp>
+      <p:sp>
+        <p:nvSpPr>
+          <p:cNvPr id="63" name="Text 56"/>
+          <p:cNvSpPr/>
+          <p:nvPr/>
+        </p:nvSpPr>
+        <p:spPr>
+          <a:xfrm>
+            <a:off x="13845654" y="21077474"/>
+            <a:ext cx="4114800" cy="457200"/>
           </a:xfrm>
           <a:prstGeom prst="rect">
             <a:avLst/>
@@ -4081,22 +4088,88 @@
           <a:bodyPr wrap="square" lIns="0" tIns="0" rIns="0" bIns="0" rtlCol="0" anchor="ctr"/>
           <a:lstStyle/>
           <a:p>
-            <a:pPr marL="0" indent="0">
+            <a:pPr algn="ctr"/>
+            <a:r>
+              <a:rPr lang="en-US" sz="1600" dirty="0">
+                <a:solidFill>
+                  <a:srgbClr val="5C4A37"/>
+                </a:solidFill>
+                <a:latin typeface="Calibri" pitchFamily="34" charset="0"/>
+                <a:ea typeface="Calibri" pitchFamily="34" charset="-122"/>
+                <a:cs typeface="Calibri" pitchFamily="34" charset="-120"/>
+              </a:rPr>
+              <a:t>C275F's largest AVAS-tested active space · within Heron r3 capacity</a:t>
+            </a:r>
+            <a:endParaRPr lang="en-US" sz="1600" dirty="0"/>
+          </a:p>
+        </p:txBody>
+      </p:sp>
+      <p:sp>
+        <p:nvSpPr>
+          <p:cNvPr id="64" name="Text 57"/>
+          <p:cNvSpPr/>
+          <p:nvPr/>
+        </p:nvSpPr>
+        <p:spPr>
+          <a:xfrm>
+            <a:off x="23030596" y="20311907"/>
+            <a:ext cx="743803" cy="831885"/>
+          </a:xfrm>
+          <a:prstGeom prst="rect">
+            <a:avLst/>
+          </a:prstGeom>
+          <a:noFill/>
+          <a:ln/>
+        </p:spPr>
+        <p:txBody>
+          <a:bodyPr wrap="square" lIns="0" tIns="0" rIns="0" bIns="0" rtlCol="0" anchor="ctr"/>
+          <a:lstStyle/>
+          <a:p>
+            <a:pPr marL="0" indent="0" algn="r">
               <a:buNone/>
             </a:pPr>
             <a:r>
-              <a:rPr lang="en-US" sz="1600" b="1" dirty="0">
-                <a:solidFill>
-                  <a:srgbClr val="1F1409"/>
-                </a:solidFill>
-                <a:latin typeface="Calibri" pitchFamily="34" charset="0"/>
-                <a:ea typeface="Calibri" pitchFamily="34" charset="-122"/>
-                <a:cs typeface="Calibri" pitchFamily="34" charset="-120"/>
-              </a:rPr>
-              <a:t>NGS-informed radiotherapy decision support — </a:t>
-            </a:r>
-            <a:r>
-              <a:rPr lang="en-US" sz="1600" i="1" dirty="0">
+              <a:rPr lang="he-IL" sz="6400" b="1" dirty="0">
+                <a:solidFill>
+                  <a:srgbClr val="C75A2E"/>
+                </a:solidFill>
+                <a:latin typeface="David" panose="020E0502060401010101" pitchFamily="34" charset="-79"/>
+                <a:ea typeface="Georgia" pitchFamily="34" charset="-122"/>
+                <a:cs typeface="David" panose="020E0502060401010101" pitchFamily="34" charset="-79"/>
+              </a:rPr>
+              <a:t>8</a:t>
+            </a:r>
+            <a:endParaRPr lang="en-US" sz="6400" dirty="0">
+              <a:latin typeface="David" panose="020E0502060401010101" pitchFamily="34" charset="-79"/>
+              <a:cs typeface="David" panose="020E0502060401010101" pitchFamily="34" charset="-79"/>
+            </a:endParaRPr>
+          </a:p>
+        </p:txBody>
+      </p:sp>
+      <p:sp>
+        <p:nvSpPr>
+          <p:cNvPr id="65" name="Text 58"/>
+          <p:cNvSpPr/>
+          <p:nvPr/>
+        </p:nvSpPr>
+        <p:spPr>
+          <a:xfrm>
+            <a:off x="21628285" y="21051254"/>
+            <a:ext cx="4114800" cy="457200"/>
+          </a:xfrm>
+          <a:prstGeom prst="rect">
+            <a:avLst/>
+          </a:prstGeom>
+          <a:noFill/>
+          <a:ln/>
+        </p:spPr>
+        <p:txBody>
+          <a:bodyPr wrap="square" lIns="0" tIns="0" rIns="0" bIns="0" rtlCol="0" anchor="ctr"/>
+          <a:lstStyle/>
+          <a:p>
+            <a:pPr algn="ctr"/>
+            <a:r>
+              <a:rPr lang="en-US" sz="1600" dirty="0">
                 <a:solidFill>
                   <a:srgbClr val="5C4A37"/>
                 </a:solidFill>
@@ -4104,7 +4177,7 @@
                 <a:ea typeface="Calibri" pitchFamily="34" charset="-122"/>
                 <a:cs typeface="Calibri" pitchFamily="34" charset="-120"/>
               </a:rPr>
-              <a:t>quantum-derived mechanistic features for radioresistance in TP53 structural-mutant tumors. Reserved for a post-doctoral program extending the dissertation infrastructure into clinical decision support.</a:t>
+              <a:t>DMRG-classified targets, all Class B</a:t>
             </a:r>
             <a:endParaRPr lang="en-US" sz="1600" dirty="0"/>
           </a:p>
@@ -4112,14 +4185,14 @@
       </p:sp>
       <p:sp>
         <p:nvSpPr>
-          <p:cNvPr id="62" name="Text 55"/>
-          <p:cNvSpPr/>
-          <p:nvPr/>
-        </p:nvSpPr>
-        <p:spPr>
-          <a:xfrm>
-            <a:off x="14630400" y="20330160"/>
-            <a:ext cx="1828800" cy="914400"/>
+          <p:cNvPr id="66" name="Text 59"/>
+          <p:cNvSpPr/>
+          <p:nvPr/>
+        </p:nvSpPr>
+        <p:spPr>
+          <a:xfrm>
+            <a:off x="26517600" y="20180220"/>
+            <a:ext cx="4114800" cy="914400"/>
           </a:xfrm>
           <a:prstGeom prst="rect">
             <a:avLst/>
@@ -4143,7 +4216,7 @@
                 <a:ea typeface="Georgia" pitchFamily="34" charset="-122"/>
                 <a:cs typeface="Georgia" pitchFamily="34" charset="-120"/>
               </a:rPr>
-              <a:t>~88</a:t>
+              <a:t>100%</a:t>
             </a:r>
             <a:endParaRPr lang="en-US" sz="6400" dirty="0"/>
           </a:p>
@@ -4151,14 +4224,14 @@
       </p:sp>
       <p:sp>
         <p:nvSpPr>
-          <p:cNvPr id="63" name="Text 56"/>
-          <p:cNvSpPr/>
-          <p:nvPr/>
-        </p:nvSpPr>
-        <p:spPr>
-          <a:xfrm>
-            <a:off x="13845654" y="21077474"/>
-            <a:ext cx="4114800" cy="457200"/>
+          <p:cNvPr id="67" name="Text 60"/>
+          <p:cNvSpPr/>
+          <p:nvPr/>
+        </p:nvSpPr>
+        <p:spPr>
+          <a:xfrm>
+            <a:off x="27520710" y="21070191"/>
+            <a:ext cx="4620449" cy="457200"/>
           </a:xfrm>
           <a:prstGeom prst="rect">
             <a:avLst/>
@@ -4170,9 +4243,7 @@
           <a:bodyPr wrap="square" lIns="0" tIns="0" rIns="0" bIns="0" rtlCol="0" anchor="ctr"/>
           <a:lstStyle/>
           <a:p>
-            <a:pPr marL="0" indent="0" algn="ctr">
-              <a:buNone/>
-            </a:pPr>
+            <a:pPr algn="ctr"/>
             <a:r>
               <a:rPr lang="en-US" sz="1600" dirty="0">
                 <a:solidFill>
@@ -4182,7 +4253,7 @@
                 <a:ea typeface="Calibri" pitchFamily="34" charset="-122"/>
                 <a:cs typeface="Calibri" pitchFamily="34" charset="-120"/>
               </a:rPr>
-              <a:t>Qubits at full active site (IBM Heron r3 range)</a:t>
+              <a:t>of measured targets converged to Class B (8/8, DMRG)</a:t>
             </a:r>
             <a:endParaRPr lang="en-US" sz="1600" dirty="0"/>
           </a:p>
@@ -4190,169 +4261,13 @@
       </p:sp>
       <p:sp>
         <p:nvSpPr>
-          <p:cNvPr id="64" name="Text 57"/>
-          <p:cNvSpPr/>
-          <p:nvPr/>
-        </p:nvSpPr>
-        <p:spPr>
-          <a:xfrm>
-            <a:off x="23030596" y="20220466"/>
-            <a:ext cx="743803" cy="831885"/>
-          </a:xfrm>
-          <a:prstGeom prst="rect">
-            <a:avLst/>
-          </a:prstGeom>
-          <a:noFill/>
-          <a:ln/>
-        </p:spPr>
-        <p:txBody>
-          <a:bodyPr wrap="square" lIns="0" tIns="0" rIns="0" bIns="0" rtlCol="0" anchor="ctr"/>
-          <a:lstStyle/>
-          <a:p>
-            <a:pPr marL="0" indent="0" algn="r">
-              <a:buNone/>
-            </a:pPr>
-            <a:r>
-              <a:rPr lang="en-US" sz="6400" b="1" dirty="0">
-                <a:solidFill>
-                  <a:srgbClr val="C75A2E"/>
-                </a:solidFill>
-                <a:latin typeface="Georgia" pitchFamily="34" charset="0"/>
-                <a:ea typeface="Georgia" pitchFamily="34" charset="-122"/>
-                <a:cs typeface="Georgia" pitchFamily="34" charset="-120"/>
-              </a:rPr>
-              <a:t>7</a:t>
-            </a:r>
-            <a:endParaRPr lang="en-US" sz="6400" dirty="0"/>
-          </a:p>
-        </p:txBody>
-      </p:sp>
-      <p:sp>
-        <p:nvSpPr>
-          <p:cNvPr id="65" name="Text 58"/>
-          <p:cNvSpPr/>
-          <p:nvPr/>
-        </p:nvSpPr>
-        <p:spPr>
-          <a:xfrm>
-            <a:off x="21628285" y="21051254"/>
-            <a:ext cx="4114800" cy="457200"/>
-          </a:xfrm>
-          <a:prstGeom prst="rect">
-            <a:avLst/>
-          </a:prstGeom>
-          <a:noFill/>
-          <a:ln/>
-        </p:spPr>
-        <p:txBody>
-          <a:bodyPr wrap="square" lIns="0" tIns="0" rIns="0" bIns="0" rtlCol="0" anchor="ctr"/>
-          <a:lstStyle/>
-          <a:p>
-            <a:pPr marL="0" indent="0" algn="ctr">
-              <a:buNone/>
-            </a:pPr>
-            <a:r>
-              <a:rPr lang="en-US" sz="1600" dirty="0">
-                <a:solidFill>
-                  <a:srgbClr val="5C4A37"/>
-                </a:solidFill>
-                <a:latin typeface="Calibri" pitchFamily="34" charset="0"/>
-                <a:ea typeface="Calibri" pitchFamily="34" charset="-122"/>
-                <a:cs typeface="Calibri" pitchFamily="34" charset="-120"/>
-              </a:rPr>
-              <a:t>core non-druggable mutations · 25+ genes platform-wide</a:t>
-            </a:r>
-            <a:endParaRPr lang="en-US" sz="1600" dirty="0"/>
-          </a:p>
-        </p:txBody>
-      </p:sp>
-      <p:sp>
-        <p:nvSpPr>
-          <p:cNvPr id="66" name="Text 59"/>
-          <p:cNvSpPr/>
-          <p:nvPr/>
-        </p:nvSpPr>
-        <p:spPr>
-          <a:xfrm>
-            <a:off x="26517600" y="20253960"/>
-            <a:ext cx="4114800" cy="914400"/>
-          </a:xfrm>
-          <a:prstGeom prst="rect">
-            <a:avLst/>
-          </a:prstGeom>
-          <a:noFill/>
-          <a:ln/>
-        </p:spPr>
-        <p:txBody>
-          <a:bodyPr wrap="square" lIns="0" tIns="0" rIns="0" bIns="0" rtlCol="0" anchor="ctr"/>
-          <a:lstStyle/>
-          <a:p>
-            <a:pPr marL="0" indent="0" algn="r">
-              <a:buNone/>
-            </a:pPr>
-            <a:r>
-              <a:rPr lang="en-US" sz="6400" b="1" dirty="0">
-                <a:solidFill>
-                  <a:srgbClr val="C75A2E"/>
-                </a:solidFill>
-                <a:latin typeface="Georgia" pitchFamily="34" charset="0"/>
-                <a:ea typeface="Georgia" pitchFamily="34" charset="-122"/>
-                <a:cs typeface="Georgia" pitchFamily="34" charset="-120"/>
-              </a:rPr>
-              <a:t>100%</a:t>
-            </a:r>
-            <a:endParaRPr lang="en-US" sz="6400" dirty="0"/>
-          </a:p>
-        </p:txBody>
-      </p:sp>
-      <p:sp>
-        <p:nvSpPr>
-          <p:cNvPr id="67" name="Text 60"/>
-          <p:cNvSpPr/>
-          <p:nvPr/>
-        </p:nvSpPr>
-        <p:spPr>
-          <a:xfrm>
-            <a:off x="27520711" y="21143931"/>
-            <a:ext cx="4114800" cy="457200"/>
-          </a:xfrm>
-          <a:prstGeom prst="rect">
-            <a:avLst/>
-          </a:prstGeom>
-          <a:noFill/>
-          <a:ln/>
-        </p:spPr>
-        <p:txBody>
-          <a:bodyPr wrap="square" lIns="0" tIns="0" rIns="0" bIns="0" rtlCol="0" anchor="ctr"/>
-          <a:lstStyle/>
-          <a:p>
-            <a:pPr marL="0" indent="0" algn="ctr">
-              <a:buNone/>
-            </a:pPr>
-            <a:r>
-              <a:rPr lang="en-US" sz="1600" dirty="0">
-                <a:solidFill>
-                  <a:srgbClr val="5C4A37"/>
-                </a:solidFill>
-                <a:latin typeface="Calibri" pitchFamily="34" charset="0"/>
-                <a:ea typeface="Calibri" pitchFamily="34" charset="-122"/>
-                <a:cs typeface="Calibri" pitchFamily="34" charset="-120"/>
-              </a:rPr>
-              <a:t>of validated core targets with live JW Hamiltonians</a:t>
-            </a:r>
-            <a:endParaRPr lang="en-US" sz="1600" dirty="0"/>
-          </a:p>
-        </p:txBody>
-      </p:sp>
-      <p:sp>
-        <p:nvSpPr>
           <p:cNvPr id="68" name="Shape 61"/>
           <p:cNvSpPr/>
           <p:nvPr/>
         </p:nvSpPr>
         <p:spPr>
           <a:xfrm>
-            <a:off x="0" y="21808440"/>
+            <a:off x="104503" y="21828033"/>
             <a:ext cx="32918400" cy="137160"/>
           </a:xfrm>
           <a:prstGeom prst="rect">
@@ -4367,40 +4282,11 @@
           <a:bodyPr/>
           <a:lstStyle/>
           <a:p>
+            <a:pPr marL="0" algn="r" defTabSz="914400" rtl="1" eaLnBrk="1" latinLnBrk="0" hangingPunct="1"/>
             <a:endParaRPr lang="en-US"/>
           </a:p>
         </p:txBody>
       </p:sp>
-      <p:pic>
-        <p:nvPicPr>
-          <p:cNvPr id="70" name="Picture 69">
-            <a:extLst>
-              <a:ext uri="{FF2B5EF4-FFF2-40B4-BE49-F238E27FC236}">
-                <a16:creationId xmlns:a16="http://schemas.microsoft.com/office/drawing/2014/main" id="{3E56C2E1-9C77-B785-B350-71C053586CD3}"/>
-              </a:ext>
-            </a:extLst>
-          </p:cNvPr>
-          <p:cNvPicPr>
-            <a:picLocks noChangeAspect="1"/>
-          </p:cNvPicPr>
-          <p:nvPr/>
-        </p:nvPicPr>
-        <p:blipFill>
-          <a:blip r:embed="rId7"/>
-          <a:stretch>
-            <a:fillRect/>
-          </a:stretch>
-        </p:blipFill>
-        <p:spPr>
-          <a:xfrm>
-            <a:off x="9409470" y="11649456"/>
-            <a:ext cx="6821129" cy="4489704"/>
-          </a:xfrm>
-          <a:prstGeom prst="rect">
-            <a:avLst/>
-          </a:prstGeom>
-        </p:spPr>
-      </p:pic>
       <p:sp>
         <p:nvSpPr>
           <p:cNvPr id="41" name="TextBox 40">
@@ -4500,8 +4386,8 @@
         </p:nvSpPr>
         <p:spPr>
           <a:xfrm>
-            <a:off x="868680" y="9629429"/>
-            <a:ext cx="7957268" cy="883395"/>
+            <a:off x="868680" y="9095385"/>
+            <a:ext cx="9304020" cy="883395"/>
           </a:xfrm>
           <a:prstGeom prst="rect">
             <a:avLst/>
@@ -4533,18 +4419,15 @@
                 <a:ea typeface="Calibri" pitchFamily="34" charset="-122"/>
                 <a:cs typeface="Calibri" pitchFamily="34" charset="-120"/>
               </a:rPr>
-              <a:t>the fermionic Hamiltonian eigenvalue problem at C275F admits a known BQP-class quantum algorithm; </a:t>
-            </a:r>
-            <a:r>
-              <a:rPr lang="en-US" i="1" dirty="0">
-                <a:solidFill>
-                  <a:srgbClr val="1F1409"/>
-                </a:solidFill>
-                <a:latin typeface="Calibri" pitchFamily="34" charset="0"/>
-                <a:cs typeface="Calibri" pitchFamily="34" charset="-120"/>
-              </a:rPr>
-              <a:t>Classical methods become computationally prohibitive at chemical accuracy</a:t>
-            </a:r>
+              <a:t>the fermionic Hamiltonian eigenvalue problem at C275F admits a known BQP-class quantum algorithm. Real DMRG measurements on today's generic, not-yet-chemist-defined active space, classify Class B (quantum-advantaged) across every target tested. A chemist-defined setup could plausibly shift a target to Class A (quantum-necessary). The architecture is built for either outcome.</a:t>
+            </a:r>
+            <a:endParaRPr lang="en-US" i="1" dirty="0">
+              <a:solidFill>
+                <a:srgbClr val="1F1409"/>
+              </a:solidFill>
+              <a:latin typeface="Calibri" pitchFamily="34" charset="0"/>
+              <a:cs typeface="Calibri" pitchFamily="34" charset="-120"/>
+            </a:endParaRPr>
           </a:p>
         </p:txBody>
       </p:sp>
@@ -4557,7 +4440,7 @@
           <p:nvPr/>
         </p:nvPicPr>
         <p:blipFill>
-          <a:blip r:embed="rId8"/>
+          <a:blip r:embed="rId5"/>
           <a:stretch>
             <a:fillRect/>
           </a:stretch>
@@ -4566,6 +4449,66 @@
           <a:xfrm>
             <a:off x="30540960" y="1874520"/>
             <a:ext cx="1828800" cy="1828800"/>
+          </a:xfrm>
+          <a:prstGeom prst="rect">
+            <a:avLst/>
+          </a:prstGeom>
+        </p:spPr>
+      </p:pic>
+      <p:pic>
+        <p:nvPicPr>
+          <p:cNvPr id="17" name="Picture 16">
+            <a:extLst>
+              <a:ext uri="{FF2B5EF4-FFF2-40B4-BE49-F238E27FC236}">
+                <a16:creationId xmlns:a16="http://schemas.microsoft.com/office/drawing/2014/main" id="{B84AEB68-9390-2AE2-976C-EF9ECB74ED12}"/>
+              </a:ext>
+            </a:extLst>
+          </p:cNvPr>
+          <p:cNvPicPr>
+            <a:picLocks noChangeAspect="1"/>
+          </p:cNvPicPr>
+          <p:nvPr/>
+        </p:nvPicPr>
+        <p:blipFill>
+          <a:blip r:embed="rId6"/>
+          <a:stretch>
+            <a:fillRect/>
+          </a:stretch>
+        </p:blipFill>
+        <p:spPr>
+          <a:xfrm>
+            <a:off x="25727972" y="11600798"/>
+            <a:ext cx="6659255" cy="4730747"/>
+          </a:xfrm>
+          <a:prstGeom prst="rect">
+            <a:avLst/>
+          </a:prstGeom>
+        </p:spPr>
+      </p:pic>
+      <p:pic>
+        <p:nvPicPr>
+          <p:cNvPr id="74" name="Picture 73">
+            <a:extLst>
+              <a:ext uri="{FF2B5EF4-FFF2-40B4-BE49-F238E27FC236}">
+                <a16:creationId xmlns:a16="http://schemas.microsoft.com/office/drawing/2014/main" id="{144D0589-0639-A61B-E246-ED0AF2A3537B}"/>
+              </a:ext>
+            </a:extLst>
+          </p:cNvPr>
+          <p:cNvPicPr>
+            <a:picLocks noChangeAspect="1"/>
+          </p:cNvPicPr>
+          <p:nvPr/>
+        </p:nvPicPr>
+        <p:blipFill>
+          <a:blip r:embed="rId7"/>
+          <a:stretch>
+            <a:fillRect/>
+          </a:stretch>
+        </p:blipFill>
+        <p:spPr>
+          <a:xfrm>
+            <a:off x="9990884" y="11475300"/>
+            <a:ext cx="6389888" cy="4663709"/>
           </a:xfrm>
           <a:prstGeom prst="rect">
             <a:avLst/>

--- a/arxiv/IST697_Final_Poster.pptx
+++ b/arxiv/IST697_Final_Poster.pptx
@@ -784,7 +784,7 @@
                 </a:solidFill>
                 <a:latin typeface="Georgia" pitchFamily="34" charset="0"/>
               </a:rPr>
-              <a:t> for Quantum Simulation of Non-druggable NSCLC Tumor Suppressor Mutations</a:t>
+              <a:t> for Quantum Simulation of Undruggable NSCLC Tumor Suppressor Mutations</a:t>
             </a:r>
           </a:p>
         </p:txBody>
@@ -1047,7 +1047,7 @@
                 </a:solidFill>
                 <a:latin typeface="Georgia" pitchFamily="34" charset="0"/>
               </a:rPr>
-              <a:t>Non-druggable</a:t>
+              <a:t>Undruggable</a:t>
             </a:r>
             <a:r>
               <a:rPr lang="en-US" sz="2800" b="1" dirty="0">
@@ -1486,7 +1486,7 @@
                 <a:ea typeface="Calibri" pitchFamily="34" charset="-122"/>
                 <a:cs typeface="Calibri" pitchFamily="34" charset="-120"/>
               </a:rPr>
-              <a:t> Patient case MI25-0349 · TP53 C275F · non-druggable tumor-suppressor mutation</a:t>
+              <a:t> Patient case MI25-0349 · TP53 C275F · Undruggable tumor-suppressor mutation</a:t>
             </a:r>
             <a:endParaRPr lang="en-US" dirty="0"/>
           </a:p>
@@ -3904,7 +3904,7 @@
                 <a:latin typeface="Calibri" pitchFamily="34" charset="0"/>
                 <a:cs typeface="Calibri" pitchFamily="34" charset="-120"/>
               </a:rPr>
-              <a:t>classification for non-druggable oncology targets - reusable across mutation classes</a:t>
+              <a:t>classification for undruggable oncology targets - reusable across mutation classes</a:t>
             </a:r>
           </a:p>
           <a:p>

--- a/arxiv/IST697_Final_Poster.pptx
+++ b/arxiv/IST697_Final_Poster.pptx
@@ -784,7 +784,7 @@
                 </a:solidFill>
                 <a:latin typeface="Georgia" pitchFamily="34" charset="0"/>
               </a:rPr>
-              <a:t> for Quantum Simulation of Undruggable NSCLC Tumor Suppressor Mutations</a:t>
+              <a:t> for Quantum Simulation of Non-druggable NSCLC Tumor Suppressor Mutations</a:t>
             </a:r>
           </a:p>
         </p:txBody>
@@ -1047,7 +1047,7 @@
                 </a:solidFill>
                 <a:latin typeface="Georgia" pitchFamily="34" charset="0"/>
               </a:rPr>
-              <a:t>Undruggable</a:t>
+              <a:t>Non-druggable</a:t>
             </a:r>
             <a:r>
               <a:rPr lang="en-US" sz="2800" b="1" dirty="0">
@@ -1486,7 +1486,7 @@
                 <a:ea typeface="Calibri" pitchFamily="34" charset="-122"/>
                 <a:cs typeface="Calibri" pitchFamily="34" charset="-120"/>
               </a:rPr>
-              <a:t> Patient case MI25-0349 · TP53 C275F · Undruggable tumor-suppressor mutation</a:t>
+              <a:t> Patient case MI25-0349 · TP53 C275F · non-druggable tumor-suppressor mutation</a:t>
             </a:r>
             <a:endParaRPr lang="en-US" dirty="0"/>
           </a:p>
@@ -3904,7 +3904,7 @@
                 <a:latin typeface="Calibri" pitchFamily="34" charset="0"/>
                 <a:cs typeface="Calibri" pitchFamily="34" charset="-120"/>
               </a:rPr>
-              <a:t>classification for undruggable oncology targets - reusable across mutation classes</a:t>
+              <a:t>classification for non-druggable oncology targets - reusable across mutation classes</a:t>
             </a:r>
           </a:p>
           <a:p>

--- a/arxiv/IST697_Final_Poster.pptx
+++ b/arxiv/IST697_Final_Poster.pptx
@@ -3923,7 +3923,7 @@
                 <a:latin typeface="Calibri" pitchFamily="34" charset="0"/>
                 <a:cs typeface="Calibri" pitchFamily="34" charset="-120"/>
               </a:rPr>
-              <a:t>Unlike quantum-enhanced approaches targeting classically-tractable proteins (e.g. KRAS — Vakili et al., Nature Biotechnology 2025), quantum necessity here is established empirically, not assumed - a DMRG classifier tests every target before any quantum claim is made</a:t>
+              <a:t>Unlike quantum-enhanced approaches targeting classically-tractable proteins (e.g. KRAS — Vakili et al., Nature Biotechnology 2025), quantum necessity here is established empirically, not assumed - a DMRG classifier tests every target before any quantum claim is made, now cross-checked against an independent solver (SHCI, 0.198 mHa agreement)</a:t>
             </a:r>
           </a:p>
           <a:p>

--- a/arxiv/IST697_Final_Poster.pptx
+++ b/arxiv/IST697_Final_Poster.pptx
@@ -3556,7 +3556,7 @@
                 <a:ea typeface="Calibri" pitchFamily="34" charset="-122"/>
                 <a:cs typeface="Calibri" pitchFamily="34" charset="-120"/>
               </a:rPr>
-              <a:t> - PennyLane 4-qubit live VQE + 20e/40q HPC run, both complete (LEON-sealed, 2026-08-04) · </a:t>
+              <a:t> - PennyLane 4-qubit live VQE + 20e/40q HPC run, both complete (LEON-sealed, Aug 2026) · </a:t>
             </a:r>
             <a:r>
               <a:rPr lang="en-US" dirty="0" err="1">

--- a/arxiv/IST697_Final_Poster.pptx
+++ b/arxiv/IST697_Final_Poster.pptx
@@ -754,37 +754,22 @@
           <a:p>
             <a:pPr algn="ctr"/>
             <a:r>
-              <a:rPr lang="en-US" sz="5000" b="1" dirty="0">
+              <a:rPr lang="en-US" sz="4000" b="1" dirty="0">
                 <a:solidFill>
                   <a:srgbClr val="C00000"/>
                 </a:solidFill>
                 <a:latin typeface="Georgia" pitchFamily="34" charset="0"/>
               </a:rPr>
-              <a:t>Governed</a:t>
-            </a:r>
-            <a:r>
-              <a:rPr lang="en-US" sz="5000" b="1" dirty="0">
+              <a:t>Deciding</a:t>
+            </a:r>
+            <a:r>
+              <a:rPr lang="en-US" sz="4000" b="1" dirty="0">
                 <a:solidFill>
                   <a:srgbClr val="1F1409"/>
                 </a:solidFill>
                 <a:latin typeface="Georgia" pitchFamily="34" charset="0"/>
               </a:rPr>
-              <a:t> QC-AI-HPC </a:t>
-            </a:r>
-            <a:r>
-              <a:rPr lang="en-US" sz="5000" b="1" dirty="0">
-                <a:latin typeface="Georgia" pitchFamily="34" charset="0"/>
-              </a:rPr>
-              <a:t>Orchestration</a:t>
-            </a:r>
-            <a:r>
-              <a:rPr lang="en-US" sz="5000" b="1" dirty="0">
-                <a:solidFill>
-                  <a:srgbClr val="1F1409"/>
-                </a:solidFill>
-                <a:latin typeface="Georgia" pitchFamily="34" charset="0"/>
-              </a:rPr>
-              <a:t> for Quantum Simulation of Non-druggable NSCLC Tumor Suppressor Mutations</a:t>
+              <a:t> When Quantum Computation Is Warranted: A Governed Instrument for Classical-Tractability Adjudication in Non-Druggable Oncology</a:t>
             </a:r>
           </a:p>
         </p:txBody>

--- a/arxiv/IST697_Final_Poster.pptx
+++ b/arxiv/IST697_Final_Poster.pptx
@@ -3617,7 +3617,7 @@
                 <a:ea typeface="Calibri" pitchFamily="34" charset="-122"/>
                 <a:cs typeface="Calibri" pitchFamily="34" charset="-120"/>
               </a:rPr>
-              <a:t>C275F: 24–56q active site, DMRG Class B · proven feasible (94q, Merz et al. 2026) · KEAP1/STK11: current-era, 32–74q, DMRG Class B · PDB-verified</a:t>
+              <a:t>C275F: 24–56q active site, DMRG Class B · well within Heron r3's 156q capacity · KEAP1/STK11: current-era, 32–74q, DMRG Class B · PDB-verified</a:t>
             </a:r>
             <a:endParaRPr lang="en-US" dirty="0"/>
           </a:p>
